--- a/PPTs/Ch12_13_Fixed_Floating_Point_Numbers Exercises ANS.pptx
+++ b/PPTs/Ch12_13_Fixed_Floating_Point_Numbers Exercises ANS.pptx
@@ -5,15 +5,18 @@
     <p:sldMasterId id="2147483660" r:id="rId1"/>
   </p:sldMasterIdLst>
   <p:notesMasterIdLst>
-    <p:notesMasterId r:id="rId5"/>
+    <p:notesMasterId r:id="rId8"/>
   </p:notesMasterIdLst>
   <p:handoutMasterIdLst>
-    <p:handoutMasterId r:id="rId6"/>
+    <p:handoutMasterId r:id="rId9"/>
   </p:handoutMasterIdLst>
   <p:sldIdLst>
     <p:sldId id="280" r:id="rId2"/>
-    <p:sldId id="284" r:id="rId3"/>
-    <p:sldId id="282" r:id="rId4"/>
+    <p:sldId id="285" r:id="rId3"/>
+    <p:sldId id="286" r:id="rId4"/>
+    <p:sldId id="282" r:id="rId5"/>
+    <p:sldId id="284" r:id="rId6"/>
+    <p:sldId id="287" r:id="rId7"/>
   </p:sldIdLst>
   <p:sldSz cx="12192000" cy="6858000"/>
   <p:notesSz cx="6858000" cy="9144000"/>
@@ -134,7 +137,7 @@
 <file path=ppt/revisionInfo.xml><?xml version="1.0" encoding="utf-8"?>
 <p1510:revInfo xmlns:a="http://schemas.openxmlformats.org/drawingml/2006/main" xmlns:r="http://schemas.openxmlformats.org/officeDocument/2006/relationships" xmlns:p1510="http://schemas.microsoft.com/office/powerpoint/2015/10/main">
   <p1510:revLst>
-    <p1510:client id="{762FA64D-472A-460A-9A9D-C97849E23CAF}" v="163" dt="2025-10-05T01:25:13.721"/>
+    <p1510:client id="{1EB05B77-0231-4E3E-B6ED-D8BC6C67F85E}" v="166" dt="2025-10-26T19:33:10.031"/>
   </p1510:revLst>
 </p1510:revInfo>
 </file>
@@ -144,122 +147,10 @@
   <pc:docChgLst>
     <pc:chgData name="Zonghua Gu" userId="9a7e1853e1951ef5" providerId="LiveId" clId="{CF1FAA12-072C-4ED5-BA76-0FFFAEFDB88A}"/>
     <pc:docChg chg="undo custSel addSld delSld modSld sldOrd">
-      <pc:chgData name="Zonghua Gu" userId="9a7e1853e1951ef5" providerId="LiveId" clId="{CF1FAA12-072C-4ED5-BA76-0FFFAEFDB88A}" dt="2025-10-05T01:26:44.141" v="307" actId="47"/>
+      <pc:chgData name="Zonghua Gu" userId="9a7e1853e1951ef5" providerId="LiveId" clId="{CF1FAA12-072C-4ED5-BA76-0FFFAEFDB88A}" dt="2025-10-26T19:33:17.182" v="527" actId="20577"/>
       <pc:docMkLst>
         <pc:docMk/>
       </pc:docMkLst>
-      <pc:sldChg chg="del">
-        <pc:chgData name="Zonghua Gu" userId="9a7e1853e1951ef5" providerId="LiveId" clId="{CF1FAA12-072C-4ED5-BA76-0FFFAEFDB88A}" dt="2025-10-04T19:14:45.741" v="21" actId="47"/>
-        <pc:sldMkLst>
-          <pc:docMk/>
-          <pc:sldMk cId="4218711516" sldId="257"/>
-        </pc:sldMkLst>
-      </pc:sldChg>
-      <pc:sldChg chg="del">
-        <pc:chgData name="Zonghua Gu" userId="9a7e1853e1951ef5" providerId="LiveId" clId="{CF1FAA12-072C-4ED5-BA76-0FFFAEFDB88A}" dt="2025-10-04T19:14:45.741" v="21" actId="47"/>
-        <pc:sldMkLst>
-          <pc:docMk/>
-          <pc:sldMk cId="4111405843" sldId="258"/>
-        </pc:sldMkLst>
-      </pc:sldChg>
-      <pc:sldChg chg="del">
-        <pc:chgData name="Zonghua Gu" userId="9a7e1853e1951ef5" providerId="LiveId" clId="{CF1FAA12-072C-4ED5-BA76-0FFFAEFDB88A}" dt="2025-10-04T19:14:45.741" v="21" actId="47"/>
-        <pc:sldMkLst>
-          <pc:docMk/>
-          <pc:sldMk cId="4187797743" sldId="259"/>
-        </pc:sldMkLst>
-      </pc:sldChg>
-      <pc:sldChg chg="del">
-        <pc:chgData name="Zonghua Gu" userId="9a7e1853e1951ef5" providerId="LiveId" clId="{CF1FAA12-072C-4ED5-BA76-0FFFAEFDB88A}" dt="2025-10-04T19:14:45.741" v="21" actId="47"/>
-        <pc:sldMkLst>
-          <pc:docMk/>
-          <pc:sldMk cId="1164444141" sldId="260"/>
-        </pc:sldMkLst>
-      </pc:sldChg>
-      <pc:sldChg chg="del">
-        <pc:chgData name="Zonghua Gu" userId="9a7e1853e1951ef5" providerId="LiveId" clId="{CF1FAA12-072C-4ED5-BA76-0FFFAEFDB88A}" dt="2025-10-04T19:14:45.741" v="21" actId="47"/>
-        <pc:sldMkLst>
-          <pc:docMk/>
-          <pc:sldMk cId="2669434976" sldId="261"/>
-        </pc:sldMkLst>
-      </pc:sldChg>
-      <pc:sldChg chg="del">
-        <pc:chgData name="Zonghua Gu" userId="9a7e1853e1951ef5" providerId="LiveId" clId="{CF1FAA12-072C-4ED5-BA76-0FFFAEFDB88A}" dt="2025-10-04T19:14:45.741" v="21" actId="47"/>
-        <pc:sldMkLst>
-          <pc:docMk/>
-          <pc:sldMk cId="2896628209" sldId="264"/>
-        </pc:sldMkLst>
-      </pc:sldChg>
-      <pc:sldChg chg="del">
-        <pc:chgData name="Zonghua Gu" userId="9a7e1853e1951ef5" providerId="LiveId" clId="{CF1FAA12-072C-4ED5-BA76-0FFFAEFDB88A}" dt="2025-10-04T19:14:45.741" v="21" actId="47"/>
-        <pc:sldMkLst>
-          <pc:docMk/>
-          <pc:sldMk cId="378386796" sldId="267"/>
-        </pc:sldMkLst>
-      </pc:sldChg>
-      <pc:sldChg chg="del">
-        <pc:chgData name="Zonghua Gu" userId="9a7e1853e1951ef5" providerId="LiveId" clId="{CF1FAA12-072C-4ED5-BA76-0FFFAEFDB88A}" dt="2025-10-04T19:14:45.741" v="21" actId="47"/>
-        <pc:sldMkLst>
-          <pc:docMk/>
-          <pc:sldMk cId="2849682855" sldId="268"/>
-        </pc:sldMkLst>
-      </pc:sldChg>
-      <pc:sldChg chg="del">
-        <pc:chgData name="Zonghua Gu" userId="9a7e1853e1951ef5" providerId="LiveId" clId="{CF1FAA12-072C-4ED5-BA76-0FFFAEFDB88A}" dt="2025-10-04T19:14:45.741" v="21" actId="47"/>
-        <pc:sldMkLst>
-          <pc:docMk/>
-          <pc:sldMk cId="3558897582" sldId="270"/>
-        </pc:sldMkLst>
-      </pc:sldChg>
-      <pc:sldChg chg="del">
-        <pc:chgData name="Zonghua Gu" userId="9a7e1853e1951ef5" providerId="LiveId" clId="{CF1FAA12-072C-4ED5-BA76-0FFFAEFDB88A}" dt="2025-10-04T19:14:45.741" v="21" actId="47"/>
-        <pc:sldMkLst>
-          <pc:docMk/>
-          <pc:sldMk cId="974167674" sldId="272"/>
-        </pc:sldMkLst>
-      </pc:sldChg>
-      <pc:sldChg chg="del">
-        <pc:chgData name="Zonghua Gu" userId="9a7e1853e1951ef5" providerId="LiveId" clId="{CF1FAA12-072C-4ED5-BA76-0FFFAEFDB88A}" dt="2025-10-04T19:14:45.741" v="21" actId="47"/>
-        <pc:sldMkLst>
-          <pc:docMk/>
-          <pc:sldMk cId="413887454" sldId="273"/>
-        </pc:sldMkLst>
-      </pc:sldChg>
-      <pc:sldChg chg="del">
-        <pc:chgData name="Zonghua Gu" userId="9a7e1853e1951ef5" providerId="LiveId" clId="{CF1FAA12-072C-4ED5-BA76-0FFFAEFDB88A}" dt="2025-10-04T19:14:45.741" v="21" actId="47"/>
-        <pc:sldMkLst>
-          <pc:docMk/>
-          <pc:sldMk cId="2103323537" sldId="275"/>
-        </pc:sldMkLst>
-      </pc:sldChg>
-      <pc:sldChg chg="del">
-        <pc:chgData name="Zonghua Gu" userId="9a7e1853e1951ef5" providerId="LiveId" clId="{CF1FAA12-072C-4ED5-BA76-0FFFAEFDB88A}" dt="2025-10-04T19:14:45.741" v="21" actId="47"/>
-        <pc:sldMkLst>
-          <pc:docMk/>
-          <pc:sldMk cId="2241758158" sldId="276"/>
-        </pc:sldMkLst>
-      </pc:sldChg>
-      <pc:sldChg chg="del">
-        <pc:chgData name="Zonghua Gu" userId="9a7e1853e1951ef5" providerId="LiveId" clId="{CF1FAA12-072C-4ED5-BA76-0FFFAEFDB88A}" dt="2025-10-04T19:14:45.741" v="21" actId="47"/>
-        <pc:sldMkLst>
-          <pc:docMk/>
-          <pc:sldMk cId="430635750" sldId="277"/>
-        </pc:sldMkLst>
-      </pc:sldChg>
-      <pc:sldChg chg="del">
-        <pc:chgData name="Zonghua Gu" userId="9a7e1853e1951ef5" providerId="LiveId" clId="{CF1FAA12-072C-4ED5-BA76-0FFFAEFDB88A}" dt="2025-10-04T19:14:45.741" v="21" actId="47"/>
-        <pc:sldMkLst>
-          <pc:docMk/>
-          <pc:sldMk cId="1945936955" sldId="278"/>
-        </pc:sldMkLst>
-      </pc:sldChg>
-      <pc:sldChg chg="del">
-        <pc:chgData name="Zonghua Gu" userId="9a7e1853e1951ef5" providerId="LiveId" clId="{CF1FAA12-072C-4ED5-BA76-0FFFAEFDB88A}" dt="2025-10-04T19:14:45.741" v="21" actId="47"/>
-        <pc:sldMkLst>
-          <pc:docMk/>
-          <pc:sldMk cId="3956634377" sldId="279"/>
-        </pc:sldMkLst>
-      </pc:sldChg>
       <pc:sldChg chg="modSp mod">
         <pc:chgData name="Zonghua Gu" userId="9a7e1853e1951ef5" providerId="LiveId" clId="{CF1FAA12-072C-4ED5-BA76-0FFFAEFDB88A}" dt="2025-10-04T19:14:35.913" v="20" actId="20577"/>
         <pc:sldMkLst>
@@ -275,15 +166,8 @@
           </ac:spMkLst>
         </pc:spChg>
       </pc:sldChg>
-      <pc:sldChg chg="del">
-        <pc:chgData name="Zonghua Gu" userId="9a7e1853e1951ef5" providerId="LiveId" clId="{CF1FAA12-072C-4ED5-BA76-0FFFAEFDB88A}" dt="2025-10-04T19:14:45.741" v="21" actId="47"/>
-        <pc:sldMkLst>
-          <pc:docMk/>
-          <pc:sldMk cId="3761897037" sldId="281"/>
-        </pc:sldMkLst>
-      </pc:sldChg>
-      <pc:sldChg chg="modSp mod modNotes">
-        <pc:chgData name="Zonghua Gu" userId="9a7e1853e1951ef5" providerId="LiveId" clId="{CF1FAA12-072C-4ED5-BA76-0FFFAEFDB88A}" dt="2025-10-05T01:22:55.527" v="298" actId="108"/>
+      <pc:sldChg chg="modSp mod ord modNotes">
+        <pc:chgData name="Zonghua Gu" userId="9a7e1853e1951ef5" providerId="LiveId" clId="{CF1FAA12-072C-4ED5-BA76-0FFFAEFDB88A}" dt="2025-10-26T16:58:40.165" v="437"/>
         <pc:sldMkLst>
           <pc:docMk/>
           <pc:sldMk cId="1065607407" sldId="282"/>
@@ -305,23 +189,8 @@
           </ac:spMkLst>
         </pc:spChg>
       </pc:sldChg>
-      <pc:sldChg chg="addSp modSp new del mod">
-        <pc:chgData name="Zonghua Gu" userId="9a7e1853e1951ef5" providerId="LiveId" clId="{CF1FAA12-072C-4ED5-BA76-0FFFAEFDB88A}" dt="2025-10-05T01:26:44.141" v="307" actId="47"/>
-        <pc:sldMkLst>
-          <pc:docMk/>
-          <pc:sldMk cId="2939415303" sldId="283"/>
-        </pc:sldMkLst>
-        <pc:picChg chg="add mod">
-          <ac:chgData name="Zonghua Gu" userId="9a7e1853e1951ef5" providerId="LiveId" clId="{CF1FAA12-072C-4ED5-BA76-0FFFAEFDB88A}" dt="2025-10-05T01:07:56.949" v="72" actId="1076"/>
-          <ac:picMkLst>
-            <pc:docMk/>
-            <pc:sldMk cId="2939415303" sldId="283"/>
-            <ac:picMk id="6" creationId="{29106BA5-19AD-06EE-BE36-337E0EC7C927}"/>
-          </ac:picMkLst>
-        </pc:picChg>
-      </pc:sldChg>
       <pc:sldChg chg="modSp add mod ord modNotes">
-        <pc:chgData name="Zonghua Gu" userId="9a7e1853e1951ef5" providerId="LiveId" clId="{CF1FAA12-072C-4ED5-BA76-0FFFAEFDB88A}" dt="2025-10-05T01:25:13.716" v="306" actId="20577"/>
+        <pc:chgData name="Zonghua Gu" userId="9a7e1853e1951ef5" providerId="LiveId" clId="{CF1FAA12-072C-4ED5-BA76-0FFFAEFDB88A}" dt="2025-10-26T17:02:50.685" v="477" actId="20577"/>
         <pc:sldMkLst>
           <pc:docMk/>
           <pc:sldMk cId="2456191673" sldId="284"/>
@@ -335,11 +204,112 @@
           </ac:spMkLst>
         </pc:spChg>
         <pc:spChg chg="mod">
-          <ac:chgData name="Zonghua Gu" userId="9a7e1853e1951ef5" providerId="LiveId" clId="{CF1FAA12-072C-4ED5-BA76-0FFFAEFDB88A}" dt="2025-10-05T01:25:13.716" v="306" actId="20577"/>
+          <ac:chgData name="Zonghua Gu" userId="9a7e1853e1951ef5" providerId="LiveId" clId="{CF1FAA12-072C-4ED5-BA76-0FFFAEFDB88A}" dt="2025-10-26T17:02:50.685" v="477" actId="20577"/>
           <ac:spMkLst>
             <pc:docMk/>
             <pc:sldMk cId="2456191673" sldId="284"/>
             <ac:spMk id="4" creationId="{212C4FEB-6980-3FA2-E64E-87F97E607784}"/>
+          </ac:spMkLst>
+        </pc:spChg>
+      </pc:sldChg>
+      <pc:sldChg chg="addSp delSp modSp new mod">
+        <pc:chgData name="Zonghua Gu" userId="9a7e1853e1951ef5" providerId="LiveId" clId="{CF1FAA12-072C-4ED5-BA76-0FFFAEFDB88A}" dt="2025-10-26T18:15:01.154" v="514" actId="27636"/>
+        <pc:sldMkLst>
+          <pc:docMk/>
+          <pc:sldMk cId="1279124568" sldId="285"/>
+        </pc:sldMkLst>
+        <pc:spChg chg="mod">
+          <ac:chgData name="Zonghua Gu" userId="9a7e1853e1951ef5" providerId="LiveId" clId="{CF1FAA12-072C-4ED5-BA76-0FFFAEFDB88A}" dt="2025-10-26T16:51:05.305" v="317" actId="20577"/>
+          <ac:spMkLst>
+            <pc:docMk/>
+            <pc:sldMk cId="1279124568" sldId="285"/>
+            <ac:spMk id="2" creationId="{C6270742-443E-38AD-8D59-09C2A4744843}"/>
+          </ac:spMkLst>
+        </pc:spChg>
+        <pc:spChg chg="del">
+          <ac:chgData name="Zonghua Gu" userId="9a7e1853e1951ef5" providerId="LiveId" clId="{CF1FAA12-072C-4ED5-BA76-0FFFAEFDB88A}" dt="2025-10-26T16:50:53.036" v="312" actId="478"/>
+          <ac:spMkLst>
+            <pc:docMk/>
+            <pc:sldMk cId="1279124568" sldId="285"/>
+            <ac:spMk id="4" creationId="{E6BC5534-F86C-42E4-8278-BC7210243412}"/>
+          </ac:spMkLst>
+        </pc:spChg>
+        <pc:spChg chg="add mod">
+          <ac:chgData name="Zonghua Gu" userId="9a7e1853e1951ef5" providerId="LiveId" clId="{CF1FAA12-072C-4ED5-BA76-0FFFAEFDB88A}" dt="2025-10-26T16:50:49.786" v="311"/>
+          <ac:spMkLst>
+            <pc:docMk/>
+            <pc:sldMk cId="1279124568" sldId="285"/>
+            <ac:spMk id="5" creationId="{5F721815-B1C6-30BE-AA58-107B60E86A17}"/>
+          </ac:spMkLst>
+        </pc:spChg>
+        <pc:spChg chg="add mod">
+          <ac:chgData name="Zonghua Gu" userId="9a7e1853e1951ef5" providerId="LiveId" clId="{CF1FAA12-072C-4ED5-BA76-0FFFAEFDB88A}" dt="2025-10-26T18:15:01.154" v="514" actId="27636"/>
+          <ac:spMkLst>
+            <pc:docMk/>
+            <pc:sldMk cId="1279124568" sldId="285"/>
+            <ac:spMk id="6" creationId="{D97226D9-37FF-0AC2-DF1D-4E18E3B8EB8D}"/>
+          </ac:spMkLst>
+        </pc:spChg>
+      </pc:sldChg>
+      <pc:sldChg chg="addSp delSp modSp add mod">
+        <pc:chgData name="Zonghua Gu" userId="9a7e1853e1951ef5" providerId="LiveId" clId="{CF1FAA12-072C-4ED5-BA76-0FFFAEFDB88A}" dt="2025-10-26T18:11:22.197" v="508" actId="20577"/>
+        <pc:sldMkLst>
+          <pc:docMk/>
+          <pc:sldMk cId="2898768650" sldId="286"/>
+        </pc:sldMkLst>
+        <pc:spChg chg="mod">
+          <ac:chgData name="Zonghua Gu" userId="9a7e1853e1951ef5" providerId="LiveId" clId="{CF1FAA12-072C-4ED5-BA76-0FFFAEFDB88A}" dt="2025-10-26T16:58:34.599" v="435" actId="27636"/>
+          <ac:spMkLst>
+            <pc:docMk/>
+            <pc:sldMk cId="2898768650" sldId="286"/>
+            <ac:spMk id="2" creationId="{5EB89A4B-4426-8C55-E290-2091750F2D4C}"/>
+          </ac:spMkLst>
+        </pc:spChg>
+        <pc:spChg chg="add del mod">
+          <ac:chgData name="Zonghua Gu" userId="9a7e1853e1951ef5" providerId="LiveId" clId="{CF1FAA12-072C-4ED5-BA76-0FFFAEFDB88A}" dt="2025-10-26T16:58:56.196" v="439" actId="478"/>
+          <ac:spMkLst>
+            <pc:docMk/>
+            <pc:sldMk cId="2898768650" sldId="286"/>
+            <ac:spMk id="5" creationId="{CD75526B-D83D-1584-0F65-76AA4DE28C1C}"/>
+          </ac:spMkLst>
+        </pc:spChg>
+        <pc:spChg chg="del mod">
+          <ac:chgData name="Zonghua Gu" userId="9a7e1853e1951ef5" providerId="LiveId" clId="{CF1FAA12-072C-4ED5-BA76-0FFFAEFDB88A}" dt="2025-10-26T16:58:54.251" v="438" actId="478"/>
+          <ac:spMkLst>
+            <pc:docMk/>
+            <pc:sldMk cId="2898768650" sldId="286"/>
+            <ac:spMk id="6" creationId="{AD52CD0A-8377-3A20-B74C-29B30FEBA463}"/>
+          </ac:spMkLst>
+        </pc:spChg>
+        <pc:spChg chg="add mod">
+          <ac:chgData name="Zonghua Gu" userId="9a7e1853e1951ef5" providerId="LiveId" clId="{CF1FAA12-072C-4ED5-BA76-0FFFAEFDB88A}" dt="2025-10-26T18:11:22.197" v="508" actId="20577"/>
+          <ac:spMkLst>
+            <pc:docMk/>
+            <pc:sldMk cId="2898768650" sldId="286"/>
+            <ac:spMk id="7" creationId="{2034EC25-E314-2371-82F2-4FD3DB76022E}"/>
+          </ac:spMkLst>
+        </pc:spChg>
+      </pc:sldChg>
+      <pc:sldChg chg="modSp new mod">
+        <pc:chgData name="Zonghua Gu" userId="9a7e1853e1951ef5" providerId="LiveId" clId="{CF1FAA12-072C-4ED5-BA76-0FFFAEFDB88A}" dt="2025-10-26T19:33:17.182" v="527" actId="20577"/>
+        <pc:sldMkLst>
+          <pc:docMk/>
+          <pc:sldMk cId="778539605" sldId="287"/>
+        </pc:sldMkLst>
+        <pc:spChg chg="mod">
+          <ac:chgData name="Zonghua Gu" userId="9a7e1853e1951ef5" providerId="LiveId" clId="{CF1FAA12-072C-4ED5-BA76-0FFFAEFDB88A}" dt="2025-10-26T19:33:17.182" v="527" actId="20577"/>
+          <ac:spMkLst>
+            <pc:docMk/>
+            <pc:sldMk cId="778539605" sldId="287"/>
+            <ac:spMk id="2" creationId="{323F312F-1437-6DE5-0479-5FF9241233B3}"/>
+          </ac:spMkLst>
+        </pc:spChg>
+        <pc:spChg chg="mod">
+          <ac:chgData name="Zonghua Gu" userId="9a7e1853e1951ef5" providerId="LiveId" clId="{CF1FAA12-072C-4ED5-BA76-0FFFAEFDB88A}" dt="2025-10-26T19:33:10.031" v="516"/>
+          <ac:spMkLst>
+            <pc:docMk/>
+            <pc:sldMk cId="778539605" sldId="287"/>
+            <ac:spMk id="4" creationId="{8E7AD109-943E-C2C4-7A01-0E7FF39C01C4}"/>
           </ac:spMkLst>
         </pc:spChg>
       </pc:sldChg>
@@ -431,7 +401,7 @@
             <a:fld id="{BD4F56A7-3CDE-194F-B9AF-D598FBBF1989}" type="datetimeFigureOut">
               <a:rPr lang="en-US" smtClean="0"/>
               <a:pPr/>
-              <a:t>10/4/2025</a:t>
+              <a:t>10/26/2025</a:t>
             </a:fld>
             <a:endParaRPr lang="en-US"/>
           </a:p>
@@ -599,7 +569,7 @@
             <a:fld id="{1E52AD58-60CE-E948-9CBA-0BD7030FC28E}" type="datetimeFigureOut">
               <a:rPr lang="en-US" smtClean="0"/>
               <a:pPr/>
-              <a:t>10/4/2025</a:t>
+              <a:t>10/26/2025</a:t>
             </a:fld>
             <a:endParaRPr lang="en-US"/>
           </a:p>
@@ -878,7 +848,7 @@
         <p:cNvPr id="1" name="">
           <a:extLst>
             <a:ext uri="{FF2B5EF4-FFF2-40B4-BE49-F238E27FC236}">
-              <a16:creationId xmlns:a16="http://schemas.microsoft.com/office/drawing/2014/main" id="{196A318B-A7F2-B1BA-B0FD-811B59168212}"/>
+              <a16:creationId xmlns:a16="http://schemas.microsoft.com/office/drawing/2014/main" id="{6153E172-3650-4C7B-5F97-C2985931ECFA}"/>
             </a:ext>
           </a:extLst>
         </p:cNvPr>
@@ -898,7 +868,7 @@
           <p:cNvPr id="2" name="Slide Image Placeholder 1">
             <a:extLst>
               <a:ext uri="{FF2B5EF4-FFF2-40B4-BE49-F238E27FC236}">
-                <a16:creationId xmlns:a16="http://schemas.microsoft.com/office/drawing/2014/main" id="{97D9B82A-42D2-3565-A30C-7D73A28C7727}"/>
+                <a16:creationId xmlns:a16="http://schemas.microsoft.com/office/drawing/2014/main" id="{2FC9BEE9-8813-91E7-C25E-ECAFC22B8234}"/>
               </a:ext>
             </a:extLst>
           </p:cNvPr>
@@ -916,7 +886,7 @@
           <p:cNvPr id="3" name="Notes Placeholder 2">
             <a:extLst>
               <a:ext uri="{FF2B5EF4-FFF2-40B4-BE49-F238E27FC236}">
-                <a16:creationId xmlns:a16="http://schemas.microsoft.com/office/drawing/2014/main" id="{3D9E1536-6780-DA14-2A44-01B4B3B5564B}"/>
+                <a16:creationId xmlns:a16="http://schemas.microsoft.com/office/drawing/2014/main" id="{6D30FC57-0B47-CFB9-C2E6-7A994D940457}"/>
               </a:ext>
             </a:extLst>
           </p:cNvPr>
@@ -943,7 +913,7 @@
           <p:cNvPr id="4" name="Slide Number Placeholder 3">
             <a:extLst>
               <a:ext uri="{FF2B5EF4-FFF2-40B4-BE49-F238E27FC236}">
-                <a16:creationId xmlns:a16="http://schemas.microsoft.com/office/drawing/2014/main" id="{5D140D6C-D085-FE47-4F58-05C3DA00E929}"/>
+                <a16:creationId xmlns:a16="http://schemas.microsoft.com/office/drawing/2014/main" id="{20EA6760-4D05-8CBB-BFE2-B1758E532DD7}"/>
               </a:ext>
             </a:extLst>
           </p:cNvPr>
@@ -962,7 +932,7 @@
             <a:fld id="{D624DF53-3DD3-9F45-9E7E-472B96F1AB81}" type="slidenum">
               <a:rPr lang="en-US" smtClean="0"/>
               <a:pPr/>
-              <a:t>2</a:t>
+              <a:t>4</a:t>
             </a:fld>
             <a:endParaRPr lang="en-US"/>
           </a:p>
@@ -971,7 +941,7 @@
     </p:spTree>
     <p:extLst>
       <p:ext uri="{BB962C8B-B14F-4D97-AF65-F5344CB8AC3E}">
-        <p14:creationId xmlns:p14="http://schemas.microsoft.com/office/powerpoint/2010/main" val="3483086990"/>
+        <p14:creationId xmlns:p14="http://schemas.microsoft.com/office/powerpoint/2010/main" val="1160471992"/>
       </p:ext>
     </p:extLst>
   </p:cSld>
@@ -989,7 +959,7 @@
         <p:cNvPr id="1" name="">
           <a:extLst>
             <a:ext uri="{FF2B5EF4-FFF2-40B4-BE49-F238E27FC236}">
-              <a16:creationId xmlns:a16="http://schemas.microsoft.com/office/drawing/2014/main" id="{6153E172-3650-4C7B-5F97-C2985931ECFA}"/>
+              <a16:creationId xmlns:a16="http://schemas.microsoft.com/office/drawing/2014/main" id="{196A318B-A7F2-B1BA-B0FD-811B59168212}"/>
             </a:ext>
           </a:extLst>
         </p:cNvPr>
@@ -1009,7 +979,7 @@
           <p:cNvPr id="2" name="Slide Image Placeholder 1">
             <a:extLst>
               <a:ext uri="{FF2B5EF4-FFF2-40B4-BE49-F238E27FC236}">
-                <a16:creationId xmlns:a16="http://schemas.microsoft.com/office/drawing/2014/main" id="{2FC9BEE9-8813-91E7-C25E-ECAFC22B8234}"/>
+                <a16:creationId xmlns:a16="http://schemas.microsoft.com/office/drawing/2014/main" id="{97D9B82A-42D2-3565-A30C-7D73A28C7727}"/>
               </a:ext>
             </a:extLst>
           </p:cNvPr>
@@ -1027,7 +997,7 @@
           <p:cNvPr id="3" name="Notes Placeholder 2">
             <a:extLst>
               <a:ext uri="{FF2B5EF4-FFF2-40B4-BE49-F238E27FC236}">
-                <a16:creationId xmlns:a16="http://schemas.microsoft.com/office/drawing/2014/main" id="{6D30FC57-0B47-CFB9-C2E6-7A994D940457}"/>
+                <a16:creationId xmlns:a16="http://schemas.microsoft.com/office/drawing/2014/main" id="{3D9E1536-6780-DA14-2A44-01B4B3B5564B}"/>
               </a:ext>
             </a:extLst>
           </p:cNvPr>
@@ -1054,7 +1024,7 @@
           <p:cNvPr id="4" name="Slide Number Placeholder 3">
             <a:extLst>
               <a:ext uri="{FF2B5EF4-FFF2-40B4-BE49-F238E27FC236}">
-                <a16:creationId xmlns:a16="http://schemas.microsoft.com/office/drawing/2014/main" id="{20EA6760-4D05-8CBB-BFE2-B1758E532DD7}"/>
+                <a16:creationId xmlns:a16="http://schemas.microsoft.com/office/drawing/2014/main" id="{5D140D6C-D085-FE47-4F58-05C3DA00E929}"/>
               </a:ext>
             </a:extLst>
           </p:cNvPr>
@@ -1073,7 +1043,7 @@
             <a:fld id="{D624DF53-3DD3-9F45-9E7E-472B96F1AB81}" type="slidenum">
               <a:rPr lang="en-US" smtClean="0"/>
               <a:pPr/>
-              <a:t>3</a:t>
+              <a:t>5</a:t>
             </a:fld>
             <a:endParaRPr lang="en-US"/>
           </a:p>
@@ -1082,7 +1052,7 @@
     </p:spTree>
     <p:extLst>
       <p:ext uri="{BB962C8B-B14F-4D97-AF65-F5344CB8AC3E}">
-        <p14:creationId xmlns:p14="http://schemas.microsoft.com/office/powerpoint/2010/main" val="1160471992"/>
+        <p14:creationId xmlns:p14="http://schemas.microsoft.com/office/powerpoint/2010/main" val="3483086990"/>
       </p:ext>
     </p:extLst>
   </p:cSld>
@@ -1234,7 +1204,7 @@
             <a:pPr eaLnBrk="1" latinLnBrk="0" hangingPunct="1"/>
             <a:fld id="{8E8B2B42-CBC2-7D4E-BA50-0E7F29B4DAAB}" type="datetime1">
               <a:rPr lang="en-US" smtClean="0"/>
-              <a:t>10/4/2025</a:t>
+              <a:t>10/26/2025</a:t>
             </a:fld>
             <a:endParaRPr lang="en-US" sz="1600" dirty="0"/>
           </a:p>
@@ -1594,7 +1564,7 @@
             <a:pPr eaLnBrk="1" latinLnBrk="0" hangingPunct="1"/>
             <a:fld id="{597D1259-3A46-254C-ADDB-B5DA4F1DF3DA}" type="datetime1">
               <a:rPr lang="en-US" smtClean="0"/>
-              <a:t>10/4/2025</a:t>
+              <a:t>10/26/2025</a:t>
             </a:fld>
             <a:endParaRPr lang="en-US"/>
           </a:p>
@@ -1770,7 +1740,7 @@
             <a:pPr eaLnBrk="1" latinLnBrk="0" hangingPunct="1"/>
             <a:fld id="{CCA104EC-54AA-E04F-BDC0-22B4E8892699}" type="datetime1">
               <a:rPr lang="en-US" smtClean="0"/>
-              <a:t>10/4/2025</a:t>
+              <a:t>10/26/2025</a:t>
             </a:fld>
             <a:endParaRPr lang="en-US"/>
           </a:p>
@@ -2006,7 +1976,7 @@
             <a:pPr eaLnBrk="1" latinLnBrk="0" hangingPunct="1"/>
             <a:fld id="{A9E6F060-20EB-3246-9088-08BF5F1271DE}" type="datetime1">
               <a:rPr lang="en-US" smtClean="0"/>
-              <a:t>10/4/2025</a:t>
+              <a:t>10/26/2025</a:t>
             </a:fld>
             <a:endParaRPr lang="en-US" dirty="0"/>
           </a:p>
@@ -2276,7 +2246,7 @@
             <a:pPr eaLnBrk="1" latinLnBrk="0" hangingPunct="1"/>
             <a:fld id="{34C82E41-DA7E-CA4C-823B-C759BEA16CE8}" type="datetime1">
               <a:rPr lang="en-US" smtClean="0"/>
-              <a:t>10/4/2025</a:t>
+              <a:t>10/26/2025</a:t>
             </a:fld>
             <a:endParaRPr lang="en-US" dirty="0"/>
           </a:p>
@@ -2497,7 +2467,7 @@
             <a:pPr eaLnBrk="1" latinLnBrk="0" hangingPunct="1"/>
             <a:fld id="{2500C8B0-EB1A-0A41-B839-C4B99CD2225A}" type="datetime1">
               <a:rPr lang="en-US" smtClean="0"/>
-              <a:t>10/4/2025</a:t>
+              <a:t>10/26/2025</a:t>
             </a:fld>
             <a:endParaRPr lang="en-US"/>
           </a:p>
@@ -2850,7 +2820,7 @@
             <a:pPr eaLnBrk="1" latinLnBrk="0" hangingPunct="1"/>
             <a:fld id="{4F16605B-D952-1149-A111-28A5633BAE48}" type="datetime1">
               <a:rPr lang="en-US" smtClean="0"/>
-              <a:t>10/4/2025</a:t>
+              <a:t>10/26/2025</a:t>
             </a:fld>
             <a:endParaRPr lang="en-US"/>
           </a:p>
@@ -3083,7 +3053,7 @@
             <a:pPr eaLnBrk="1" latinLnBrk="0" hangingPunct="1"/>
             <a:fld id="{91109A1C-29B2-B04E-8365-C9D22C4AE842}" type="datetime1">
               <a:rPr lang="en-US" smtClean="0"/>
-              <a:t>10/4/2025</a:t>
+              <a:t>10/26/2025</a:t>
             </a:fld>
             <a:endParaRPr lang="en-US"/>
           </a:p>
@@ -3225,7 +3195,7 @@
             <a:pPr eaLnBrk="1" latinLnBrk="0" hangingPunct="1"/>
             <a:fld id="{2CE417B6-A42B-064A-8677-46C55C4F613A}" type="datetime1">
               <a:rPr lang="en-US" smtClean="0"/>
-              <a:t>10/4/2025</a:t>
+              <a:t>10/26/2025</a:t>
             </a:fld>
             <a:endParaRPr lang="en-US"/>
           </a:p>
@@ -3503,7 +3473,7 @@
             <a:pPr eaLnBrk="1" latinLnBrk="0" hangingPunct="1"/>
             <a:fld id="{DE76F5AD-3F1F-7141-BC8A-012C5728BE2D}" type="datetime1">
               <a:rPr lang="en-US" smtClean="0"/>
-              <a:t>10/4/2025</a:t>
+              <a:t>10/26/2025</a:t>
             </a:fld>
             <a:endParaRPr lang="en-US"/>
           </a:p>
@@ -3911,7 +3881,7 @@
             <a:pPr eaLnBrk="1" latinLnBrk="0" hangingPunct="1"/>
             <a:fld id="{09FA12B8-739E-4D47-A14C-180C3BC10865}" type="datetime1">
               <a:rPr lang="en-US" smtClean="0"/>
-              <a:t>10/4/2025</a:t>
+              <a:t>10/26/2025</a:t>
             </a:fld>
             <a:endParaRPr lang="en-US"/>
           </a:p>
@@ -4249,7 +4219,7 @@
             <a:pPr eaLnBrk="1" latinLnBrk="0" hangingPunct="1"/>
             <a:fld id="{CDD18CD8-E404-844E-A4BD-DF69B8E5881E}" type="datetime1">
               <a:rPr lang="en-US" smtClean="0"/>
-              <a:t>10/4/2025</a:t>
+              <a:t>10/26/2025</a:t>
             </a:fld>
             <a:endParaRPr lang="en-US" sz="1400" dirty="0">
               <a:solidFill>
@@ -5055,13 +5025,7 @@
   <p:cSld>
     <p:spTree>
       <p:nvGrpSpPr>
-        <p:cNvPr id="1" name="">
-          <a:extLst>
-            <a:ext uri="{FF2B5EF4-FFF2-40B4-BE49-F238E27FC236}">
-              <a16:creationId xmlns:a16="http://schemas.microsoft.com/office/drawing/2014/main" id="{54B7839F-6BE1-A1E1-A697-A2628BE5561D}"/>
-            </a:ext>
-          </a:extLst>
-        </p:cNvPr>
+        <p:cNvPr id="1" name=""/>
         <p:cNvGrpSpPr/>
         <p:nvPr/>
       </p:nvGrpSpPr>
@@ -5078,7 +5042,7 @@
           <p:cNvPr id="2" name="Title 1">
             <a:extLst>
               <a:ext uri="{FF2B5EF4-FFF2-40B4-BE49-F238E27FC236}">
-                <a16:creationId xmlns:a16="http://schemas.microsoft.com/office/drawing/2014/main" id="{B94EA5C0-5C60-1E10-E00C-5623F0B24B3A}"/>
+                <a16:creationId xmlns:a16="http://schemas.microsoft.com/office/drawing/2014/main" id="{C6270742-443E-38AD-8D59-09C2A4744843}"/>
               </a:ext>
             </a:extLst>
           </p:cNvPr>
@@ -5091,33 +5055,13 @@
         </p:nvSpPr>
         <p:spPr/>
         <p:txBody>
-          <a:bodyPr>
-            <a:normAutofit fontScale="90000"/>
-          </a:bodyPr>
+          <a:bodyPr/>
           <a:lstStyle/>
           <a:p>
             <a:r>
-              <a:rPr lang="en-US" b="1" dirty="0"/>
-              <a:t>Decoding </a:t>
+              <a:rPr lang="en-US" dirty="0"/>
+              <a:t>Encoding 5.25 into IEEE Std 754 Single-Precision</a:t>
             </a:r>
-            <a:r>
-              <a:rPr lang="en-US" sz="3600" b="1" dirty="0">
-                <a:solidFill>
-                  <a:srgbClr val="C00000"/>
-                </a:solidFill>
-                <a:latin typeface="Consolas" panose="020B0609020204030204" pitchFamily="49" charset="0"/>
-                <a:cs typeface="Consolas" panose="020B0609020204030204" pitchFamily="49" charset="0"/>
-              </a:rPr>
-              <a:t>0x88888000 </a:t>
-            </a:r>
-            <a:br>
-              <a:rPr lang="en-US" b="1" dirty="0"/>
-            </a:br>
-            <a:r>
-              <a:rPr lang="en-US" b="1" dirty="0"/>
-              <a:t>into a floating-point number</a:t>
-            </a:r>
-            <a:endParaRPr lang="en-US" dirty="0"/>
           </a:p>
         </p:txBody>
       </p:sp>
@@ -5126,7 +5070,7 @@
           <p:cNvPr id="3" name="Slide Number Placeholder 2">
             <a:extLst>
               <a:ext uri="{FF2B5EF4-FFF2-40B4-BE49-F238E27FC236}">
-                <a16:creationId xmlns:a16="http://schemas.microsoft.com/office/drawing/2014/main" id="{97503BF4-38EF-F913-4D4C-365E8F1C57A5}"/>
+                <a16:creationId xmlns:a16="http://schemas.microsoft.com/office/drawing/2014/main" id="{8C55C0E7-C79F-2943-5A25-FF6AD5168162}"/>
               </a:ext>
             </a:extLst>
           </p:cNvPr>
@@ -5155,10 +5099,10 @@
         <mc:Choice xmlns:a14="http://schemas.microsoft.com/office/drawing/2010/main" Requires="a14">
           <p:sp>
             <p:nvSpPr>
-              <p:cNvPr id="4" name="Content Placeholder 3">
+              <p:cNvPr id="6" name="Content Placeholder 3">
                 <a:extLst>
                   <a:ext uri="{FF2B5EF4-FFF2-40B4-BE49-F238E27FC236}">
-                    <a16:creationId xmlns:a16="http://schemas.microsoft.com/office/drawing/2014/main" id="{212C4FEB-6980-3FA2-E64E-87F97E607784}"/>
+                    <a16:creationId xmlns:a16="http://schemas.microsoft.com/office/drawing/2014/main" id="{D97226D9-37FF-0AC2-DF1D-4E18E3B8EB8D}"/>
                   </a:ext>
                 </a:extLst>
               </p:cNvPr>
@@ -5169,16 +5113,1209 @@
                 <p:ph sz="quarter" idx="1"/>
               </p:nvPr>
             </p:nvSpPr>
-            <p:spPr/>
+            <p:spPr>
+              <a:xfrm>
+                <a:off x="990600" y="1143000"/>
+                <a:ext cx="10363200" cy="5013960"/>
+              </a:xfrm>
+            </p:spPr>
             <p:txBody>
               <a:bodyPr>
-                <a:normAutofit/>
+                <a:normAutofit fontScale="92500" lnSpcReduction="20000"/>
               </a:bodyPr>
               <a:lstStyle/>
               <a:p>
                 <a:r>
                   <a:rPr lang="en-US" dirty="0"/>
-                  <a:t>Binary </a:t>
+                  <a:t>Normalization:</a:t>
+                </a:r>
+                <a:endParaRPr lang="en-US" i="1" dirty="0">
+                  <a:latin typeface="Cambria Math"/>
+                </a:endParaRPr>
+              </a:p>
+              <a:p>
+                <a14:m>
+                  <m:oMath xmlns:m="http://schemas.openxmlformats.org/officeDocument/2006/math">
+                    <m:sSup>
+                      <m:sSupPr>
+                        <m:ctrlPr>
+                          <a:rPr lang="en-US" i="1" smtClean="0">
+                            <a:latin typeface="Cambria Math" panose="02040503050406030204" pitchFamily="18" charset="0"/>
+                          </a:rPr>
+                        </m:ctrlPr>
+                      </m:sSupPr>
+                      <m:e>
+                        <m:r>
+                          <a:rPr lang="en-US" i="1">
+                            <a:latin typeface="Cambria Math" panose="02040503050406030204" pitchFamily="18" charset="0"/>
+                          </a:rPr>
+                          <m:t>2</m:t>
+                        </m:r>
+                      </m:e>
+                      <m:sup>
+                        <m:r>
+                          <a:rPr lang="en-US" b="0" i="1" smtClean="0">
+                            <a:latin typeface="Cambria Math" panose="02040503050406030204" pitchFamily="18" charset="0"/>
+                          </a:rPr>
+                          <m:t>2</m:t>
+                        </m:r>
+                      </m:sup>
+                    </m:sSup>
+                    <m:r>
+                      <a:rPr lang="en-US" b="0" i="1" smtClean="0">
+                        <a:latin typeface="Cambria Math" panose="02040503050406030204" pitchFamily="18" charset="0"/>
+                      </a:rPr>
+                      <m:t>&lt;</m:t>
+                    </m:r>
+                    <m:r>
+                      <a:rPr lang="en-US" b="0" i="1" smtClean="0">
+                        <a:latin typeface="Cambria Math" panose="02040503050406030204" pitchFamily="18" charset="0"/>
+                      </a:rPr>
+                      <m:t>5</m:t>
+                    </m:r>
+                    <m:r>
+                      <a:rPr lang="en-US" i="1" smtClean="0">
+                        <a:latin typeface="Cambria Math"/>
+                      </a:rPr>
+                      <m:t>.</m:t>
+                    </m:r>
+                    <m:r>
+                      <a:rPr lang="en-US" b="0" i="1" smtClean="0">
+                        <a:latin typeface="Cambria Math" panose="02040503050406030204" pitchFamily="18" charset="0"/>
+                      </a:rPr>
+                      <m:t>2</m:t>
+                    </m:r>
+                    <m:r>
+                      <a:rPr lang="en-US" i="1" smtClean="0">
+                        <a:latin typeface="Cambria Math"/>
+                      </a:rPr>
+                      <m:t>5</m:t>
+                    </m:r>
+                    <m:r>
+                      <a:rPr lang="en-US" b="0" i="1" smtClean="0">
+                        <a:latin typeface="Cambria Math" panose="02040503050406030204" pitchFamily="18" charset="0"/>
+                      </a:rPr>
+                      <m:t>&lt;</m:t>
+                    </m:r>
+                    <m:sSup>
+                      <m:sSupPr>
+                        <m:ctrlPr>
+                          <a:rPr lang="en-US" b="0" i="1" smtClean="0">
+                            <a:latin typeface="Cambria Math" panose="02040503050406030204" pitchFamily="18" charset="0"/>
+                          </a:rPr>
+                        </m:ctrlPr>
+                      </m:sSupPr>
+                      <m:e>
+                        <m:r>
+                          <a:rPr lang="en-US" b="0" i="1" smtClean="0">
+                            <a:latin typeface="Cambria Math" panose="02040503050406030204" pitchFamily="18" charset="0"/>
+                          </a:rPr>
+                          <m:t>2</m:t>
+                        </m:r>
+                      </m:e>
+                      <m:sup>
+                        <m:r>
+                          <a:rPr lang="en-US" b="0" i="1" smtClean="0">
+                            <a:latin typeface="Cambria Math" panose="02040503050406030204" pitchFamily="18" charset="0"/>
+                          </a:rPr>
+                          <m:t>3</m:t>
+                        </m:r>
+                      </m:sup>
+                    </m:sSup>
+                    <m:r>
+                      <a:rPr lang="en-US" b="0" i="1" smtClean="0">
+                        <a:latin typeface="Cambria Math" panose="02040503050406030204" pitchFamily="18" charset="0"/>
+                      </a:rPr>
+                      <m:t>,</m:t>
+                    </m:r>
+                    <m:f>
+                      <m:fPr>
+                        <m:ctrlPr>
+                          <a:rPr lang="en-US" b="0" i="1" smtClean="0">
+                            <a:latin typeface="Cambria Math" panose="02040503050406030204" pitchFamily="18" charset="0"/>
+                          </a:rPr>
+                        </m:ctrlPr>
+                      </m:fPr>
+                      <m:num>
+                        <m:r>
+                          <a:rPr lang="en-US" i="1">
+                            <a:latin typeface="Cambria Math"/>
+                          </a:rPr>
+                          <m:t>5</m:t>
+                        </m:r>
+                        <m:r>
+                          <a:rPr lang="en-US" b="0" i="1" smtClean="0">
+                            <a:latin typeface="Cambria Math" panose="02040503050406030204" pitchFamily="18" charset="0"/>
+                          </a:rPr>
+                          <m:t>.</m:t>
+                        </m:r>
+                        <m:r>
+                          <a:rPr lang="en-US" b="0" i="1" smtClean="0">
+                            <a:latin typeface="Cambria Math" panose="02040503050406030204" pitchFamily="18" charset="0"/>
+                          </a:rPr>
+                          <m:t>25</m:t>
+                        </m:r>
+                      </m:num>
+                      <m:den>
+                        <m:sSup>
+                          <m:sSupPr>
+                            <m:ctrlPr>
+                              <a:rPr lang="en-US" b="0" i="1" smtClean="0">
+                                <a:latin typeface="Cambria Math" panose="02040503050406030204" pitchFamily="18" charset="0"/>
+                              </a:rPr>
+                            </m:ctrlPr>
+                          </m:sSupPr>
+                          <m:e>
+                            <m:r>
+                              <a:rPr lang="en-US" b="0" i="1" smtClean="0">
+                                <a:latin typeface="Cambria Math" panose="02040503050406030204" pitchFamily="18" charset="0"/>
+                              </a:rPr>
+                              <m:t>2</m:t>
+                            </m:r>
+                          </m:e>
+                          <m:sup>
+                            <m:r>
+                              <a:rPr lang="en-US" b="0" i="1" smtClean="0">
+                                <a:latin typeface="Cambria Math" panose="02040503050406030204" pitchFamily="18" charset="0"/>
+                              </a:rPr>
+                              <m:t>2</m:t>
+                            </m:r>
+                          </m:sup>
+                        </m:sSup>
+                      </m:den>
+                    </m:f>
+                    <m:r>
+                      <a:rPr lang="en-US" b="0" i="1" smtClean="0">
+                        <a:latin typeface="Cambria Math" panose="02040503050406030204" pitchFamily="18" charset="0"/>
+                      </a:rPr>
+                      <m:t>=</m:t>
+                    </m:r>
+                    <m:r>
+                      <a:rPr lang="en-US" b="0" i="1" smtClean="0">
+                        <a:latin typeface="Cambria Math" panose="02040503050406030204" pitchFamily="18" charset="0"/>
+                      </a:rPr>
+                      <m:t>1</m:t>
+                    </m:r>
+                    <m:r>
+                      <a:rPr lang="en-US" b="0" i="1" smtClean="0">
+                        <a:latin typeface="Cambria Math" panose="02040503050406030204" pitchFamily="18" charset="0"/>
+                      </a:rPr>
+                      <m:t>.</m:t>
+                    </m:r>
+                    <m:r>
+                      <a:rPr lang="en-US" b="0" i="1" smtClean="0">
+                        <a:latin typeface="Cambria Math" panose="02040503050406030204" pitchFamily="18" charset="0"/>
+                      </a:rPr>
+                      <m:t>3</m:t>
+                    </m:r>
+                    <m:r>
+                      <a:rPr lang="en-US" b="0" i="1" smtClean="0">
+                        <a:latin typeface="Cambria Math" panose="02040503050406030204" pitchFamily="18" charset="0"/>
+                      </a:rPr>
+                      <m:t>125</m:t>
+                    </m:r>
+                  </m:oMath>
+                </a14:m>
+                <a:endParaRPr lang="en-US" i="1" dirty="0">
+                  <a:latin typeface="Cambria Math"/>
+                </a:endParaRPr>
+              </a:p>
+              <a:p>
+                <a:r>
+                  <a:rPr lang="en-US" dirty="0"/>
+                  <a:t>Hence </a:t>
+                </a:r>
+                <a14:m>
+                  <m:oMath xmlns:m="http://schemas.openxmlformats.org/officeDocument/2006/math">
+                    <m:r>
+                      <a:rPr lang="en-US" i="1">
+                        <a:latin typeface="Cambria Math" panose="02040503050406030204" pitchFamily="18" charset="0"/>
+                      </a:rPr>
+                      <m:t>5</m:t>
+                    </m:r>
+                    <m:r>
+                      <a:rPr lang="en-US" i="1">
+                        <a:latin typeface="Cambria Math"/>
+                      </a:rPr>
+                      <m:t>.</m:t>
+                    </m:r>
+                    <m:r>
+                      <a:rPr lang="en-US" b="0" i="1" smtClean="0">
+                        <a:latin typeface="Cambria Math" panose="02040503050406030204" pitchFamily="18" charset="0"/>
+                      </a:rPr>
+                      <m:t>2</m:t>
+                    </m:r>
+                    <m:r>
+                      <a:rPr lang="en-US" i="1">
+                        <a:latin typeface="Cambria Math"/>
+                      </a:rPr>
+                      <m:t>5</m:t>
+                    </m:r>
+                    <m:r>
+                      <a:rPr lang="en-US" i="1">
+                        <a:latin typeface="Cambria Math"/>
+                      </a:rPr>
+                      <m:t>=</m:t>
+                    </m:r>
+                    <m:r>
+                      <a:rPr lang="en-US" i="1">
+                        <a:latin typeface="Cambria Math"/>
+                      </a:rPr>
+                      <m:t>1</m:t>
+                    </m:r>
+                    <m:r>
+                      <a:rPr lang="en-US" i="1">
+                        <a:latin typeface="Cambria Math"/>
+                      </a:rPr>
+                      <m:t>.</m:t>
+                    </m:r>
+                    <m:r>
+                      <a:rPr lang="en-US" b="0" i="1" smtClean="0">
+                        <a:latin typeface="Cambria Math" panose="02040503050406030204" pitchFamily="18" charset="0"/>
+                      </a:rPr>
+                      <m:t>3</m:t>
+                    </m:r>
+                    <m:r>
+                      <a:rPr lang="en-US" i="1">
+                        <a:latin typeface="Cambria Math"/>
+                      </a:rPr>
+                      <m:t>125</m:t>
+                    </m:r>
+                    <m:r>
+                      <a:rPr lang="en-US" i="1">
+                        <a:latin typeface="Cambria Math"/>
+                      </a:rPr>
+                      <m:t>×</m:t>
+                    </m:r>
+                    <m:sSup>
+                      <m:sSupPr>
+                        <m:ctrlPr>
+                          <a:rPr lang="en-US" i="1">
+                            <a:latin typeface="Cambria Math" panose="02040503050406030204" pitchFamily="18" charset="0"/>
+                          </a:rPr>
+                        </m:ctrlPr>
+                      </m:sSupPr>
+                      <m:e>
+                        <m:r>
+                          <a:rPr lang="en-US" i="1">
+                            <a:latin typeface="Cambria Math"/>
+                          </a:rPr>
+                          <m:t>2</m:t>
+                        </m:r>
+                      </m:e>
+                      <m:sup>
+                        <m:r>
+                          <a:rPr lang="en-US" b="0" i="1" smtClean="0">
+                            <a:latin typeface="Cambria Math" panose="02040503050406030204" pitchFamily="18" charset="0"/>
+                          </a:rPr>
+                          <m:t>2</m:t>
+                        </m:r>
+                      </m:sup>
+                    </m:sSup>
+                    <m:r>
+                      <m:rPr>
+                        <m:aln/>
+                      </m:rPr>
+                      <a:rPr lang="en-US" i="1">
+                        <a:latin typeface="Cambria Math"/>
+                      </a:rPr>
+                      <m:t>=</m:t>
+                    </m:r>
+                    <m:r>
+                      <a:rPr lang="en-US" i="1">
+                        <a:latin typeface="Cambria Math"/>
+                      </a:rPr>
+                      <m:t>(</m:t>
+                    </m:r>
+                    <m:r>
+                      <a:rPr lang="en-US" i="1">
+                        <a:latin typeface="Cambria Math"/>
+                      </a:rPr>
+                      <m:t>1</m:t>
+                    </m:r>
+                    <m:r>
+                      <a:rPr lang="en-US" i="1">
+                        <a:latin typeface="Cambria Math"/>
+                      </a:rPr>
+                      <m:t>+</m:t>
+                    </m:r>
+                    <m:r>
+                      <a:rPr lang="en-US" i="1">
+                        <a:latin typeface="Cambria Math"/>
+                      </a:rPr>
+                      <m:t>0</m:t>
+                    </m:r>
+                    <m:r>
+                      <a:rPr lang="en-US" i="1">
+                        <a:latin typeface="Cambria Math"/>
+                      </a:rPr>
+                      <m:t>.</m:t>
+                    </m:r>
+                    <m:r>
+                      <a:rPr lang="en-US" b="0" i="1" smtClean="0">
+                        <a:latin typeface="Cambria Math" panose="02040503050406030204" pitchFamily="18" charset="0"/>
+                      </a:rPr>
+                      <m:t>3</m:t>
+                    </m:r>
+                    <m:r>
+                      <a:rPr lang="en-US" i="1">
+                        <a:latin typeface="Cambria Math"/>
+                      </a:rPr>
+                      <m:t>125</m:t>
+                    </m:r>
+                    <m:r>
+                      <a:rPr lang="en-US" i="1">
+                        <a:latin typeface="Cambria Math"/>
+                      </a:rPr>
+                      <m:t>)×</m:t>
+                    </m:r>
+                    <m:sSup>
+                      <m:sSupPr>
+                        <m:ctrlPr>
+                          <a:rPr lang="en-US" i="1">
+                            <a:latin typeface="Cambria Math" panose="02040503050406030204" pitchFamily="18" charset="0"/>
+                          </a:rPr>
+                        </m:ctrlPr>
+                      </m:sSupPr>
+                      <m:e>
+                        <m:r>
+                          <a:rPr lang="en-US" i="1">
+                            <a:latin typeface="Cambria Math"/>
+                          </a:rPr>
+                          <m:t>2</m:t>
+                        </m:r>
+                      </m:e>
+                      <m:sup>
+                        <m:r>
+                          <a:rPr lang="en-US" b="0" i="1" smtClean="0">
+                            <a:latin typeface="Cambria Math" panose="02040503050406030204" pitchFamily="18" charset="0"/>
+                          </a:rPr>
+                          <m:t>2</m:t>
+                        </m:r>
+                      </m:sup>
+                    </m:sSup>
+                  </m:oMath>
+                </a14:m>
+                <a:endParaRPr lang="en-US" dirty="0"/>
+              </a:p>
+              <a:p>
+                <a:r>
+                  <a:rPr lang="en-US" dirty="0"/>
+                  <a:t>Conversion:</a:t>
+                </a:r>
+              </a:p>
+              <a:p>
+                <a14:m>
+                  <m:oMath xmlns:m="http://schemas.openxmlformats.org/officeDocument/2006/math">
+                    <m:r>
+                      <a:rPr lang="en-US" b="0" i="1" smtClean="0">
+                        <a:latin typeface="Cambria Math"/>
+                      </a:rPr>
+                      <m:t>𝑆𝑖𝑔𝑛</m:t>
+                    </m:r>
+                    <m:r>
+                      <a:rPr lang="en-US" b="0" i="1" smtClean="0">
+                        <a:latin typeface="Cambria Math"/>
+                      </a:rPr>
+                      <m:t>=</m:t>
+                    </m:r>
+                    <m:r>
+                      <a:rPr lang="en-US" b="0" i="1" smtClean="0">
+                        <a:latin typeface="Cambria Math"/>
+                      </a:rPr>
+                      <m:t>0</m:t>
+                    </m:r>
+                  </m:oMath>
+                </a14:m>
+                <a:endParaRPr lang="en-US" b="0" i="1" dirty="0">
+                  <a:solidFill>
+                    <a:srgbClr val="C00000"/>
+                  </a:solidFill>
+                  <a:latin typeface="Cambria Math"/>
+                </a:endParaRPr>
+              </a:p>
+              <a:p>
+                <a14:m>
+                  <m:oMath xmlns:m="http://schemas.openxmlformats.org/officeDocument/2006/math">
+                    <m:r>
+                      <a:rPr lang="en-US" i="1">
+                        <a:latin typeface="Cambria Math"/>
+                      </a:rPr>
+                      <m:t>𝐸𝑥𝑝𝑜𝑛𝑒𝑛𝑡</m:t>
+                    </m:r>
+                    <m:r>
+                      <m:rPr>
+                        <m:aln/>
+                      </m:rPr>
+                      <a:rPr lang="en-US" i="1">
+                        <a:latin typeface="Cambria Math"/>
+                      </a:rPr>
+                      <m:t>=</m:t>
+                    </m:r>
+                    <m:r>
+                      <a:rPr lang="en-US" b="0" i="1" smtClean="0">
+                        <a:latin typeface="Cambria Math" panose="02040503050406030204" pitchFamily="18" charset="0"/>
+                      </a:rPr>
+                      <m:t>2</m:t>
+                    </m:r>
+                    <m:r>
+                      <a:rPr lang="en-US" i="1">
+                        <a:latin typeface="Cambria Math"/>
+                      </a:rPr>
+                      <m:t>+</m:t>
+                    </m:r>
+                    <m:r>
+                      <a:rPr lang="en-US" i="1">
+                        <a:latin typeface="Cambria Math"/>
+                      </a:rPr>
+                      <m:t>127</m:t>
+                    </m:r>
+                    <m:r>
+                      <a:rPr lang="en-US" i="1">
+                        <a:latin typeface="Cambria Math"/>
+                      </a:rPr>
+                      <m:t>=</m:t>
+                    </m:r>
+                    <m:r>
+                      <a:rPr lang="en-US" i="1">
+                        <a:latin typeface="Cambria Math"/>
+                      </a:rPr>
+                      <m:t>129</m:t>
+                    </m:r>
+                    <m:r>
+                      <a:rPr lang="en-US" i="1">
+                        <a:latin typeface="Cambria Math"/>
+                      </a:rPr>
+                      <m:t>=</m:t>
+                    </m:r>
+                    <m:sSub>
+                      <m:sSubPr>
+                        <m:ctrlPr>
+                          <a:rPr lang="en-US" i="1">
+                            <a:latin typeface="Cambria Math" panose="02040503050406030204" pitchFamily="18" charset="0"/>
+                          </a:rPr>
+                        </m:ctrlPr>
+                      </m:sSubPr>
+                      <m:e>
+                        <m:r>
+                          <a:rPr lang="en-US" i="1" smtClean="0">
+                            <a:solidFill>
+                              <a:srgbClr val="0000FF"/>
+                            </a:solidFill>
+                            <a:latin typeface="Cambria Math"/>
+                          </a:rPr>
+                          <m:t>10000</m:t>
+                        </m:r>
+                        <m:r>
+                          <a:rPr lang="en-US" b="0" i="1" smtClean="0">
+                            <a:solidFill>
+                              <a:srgbClr val="0000FF"/>
+                            </a:solidFill>
+                            <a:latin typeface="Cambria Math" panose="02040503050406030204" pitchFamily="18" charset="0"/>
+                          </a:rPr>
+                          <m:t>01</m:t>
+                        </m:r>
+                      </m:e>
+                      <m:sub>
+                        <m:r>
+                          <a:rPr lang="en-US" i="1">
+                            <a:latin typeface="Cambria Math"/>
+                          </a:rPr>
+                          <m:t>2</m:t>
+                        </m:r>
+                      </m:sub>
+                    </m:sSub>
+                  </m:oMath>
+                </a14:m>
+                <a:endParaRPr lang="en-US" dirty="0"/>
+              </a:p>
+              <a:p>
+                <a14:m>
+                  <m:oMath xmlns:m="http://schemas.openxmlformats.org/officeDocument/2006/math">
+                    <m:r>
+                      <a:rPr lang="en-US" b="0" i="1" smtClean="0">
+                        <a:latin typeface="Cambria Math"/>
+                      </a:rPr>
+                      <m:t>𝐹𝑟𝑎𝑐𝑡𝑖𝑜𝑛</m:t>
+                    </m:r>
+                    <m:r>
+                      <a:rPr lang="en-US" i="1">
+                        <a:latin typeface="Cambria Math"/>
+                      </a:rPr>
+                      <m:t>=</m:t>
+                    </m:r>
+                    <m:sSub>
+                      <m:sSubPr>
+                        <m:ctrlPr>
+                          <a:rPr lang="en-US" i="1">
+                            <a:latin typeface="Cambria Math" panose="02040503050406030204" pitchFamily="18" charset="0"/>
+                          </a:rPr>
+                        </m:ctrlPr>
+                      </m:sSubPr>
+                      <m:e>
+                        <m:r>
+                          <a:rPr lang="en-US" b="0" i="1" smtClean="0">
+                            <a:latin typeface="Cambria Math"/>
+                          </a:rPr>
+                          <m:t>0</m:t>
+                        </m:r>
+                        <m:r>
+                          <a:rPr lang="en-US" b="0" i="1" smtClean="0">
+                            <a:latin typeface="Cambria Math"/>
+                          </a:rPr>
+                          <m:t>.</m:t>
+                        </m:r>
+                        <m:r>
+                          <a:rPr lang="en-US" b="0" i="1" smtClean="0">
+                            <a:solidFill>
+                              <a:srgbClr val="00B050"/>
+                            </a:solidFill>
+                            <a:latin typeface="Cambria Math" panose="02040503050406030204" pitchFamily="18" charset="0"/>
+                          </a:rPr>
+                          <m:t>0</m:t>
+                        </m:r>
+                        <m:r>
+                          <a:rPr lang="en-US" b="0" i="1" smtClean="0">
+                            <a:solidFill>
+                              <a:srgbClr val="00B050"/>
+                            </a:solidFill>
+                            <a:latin typeface="Cambria Math"/>
+                          </a:rPr>
+                          <m:t>101</m:t>
+                        </m:r>
+                      </m:e>
+                      <m:sub>
+                        <m:r>
+                          <a:rPr lang="en-US" i="1">
+                            <a:latin typeface="Cambria Math"/>
+                          </a:rPr>
+                          <m:t>2</m:t>
+                        </m:r>
+                      </m:sub>
+                    </m:sSub>
+                  </m:oMath>
+                </a14:m>
+                <a:r>
+                  <a:rPr lang="en-US" dirty="0"/>
+                  <a:t> (multiply by 2 repeatedly)</a:t>
+                </a:r>
+              </a:p>
+              <a:p>
+                <a:r>
+                  <a:rPr lang="en-US" dirty="0"/>
+                  <a:t>Assume </a:t>
+                </a:r>
+                <a14:m>
+                  <m:oMath xmlns:m="http://schemas.openxmlformats.org/officeDocument/2006/math">
+                    <m:r>
+                      <a:rPr lang="en-US" i="1">
+                        <a:latin typeface="Cambria Math"/>
+                      </a:rPr>
+                      <m:t>𝐹𝑟𝑎𝑐𝑡𝑖𝑜𝑛</m:t>
+                    </m:r>
+                    <m:r>
+                      <a:rPr lang="en-US" b="0" i="1" smtClean="0">
+                        <a:latin typeface="Cambria Math" panose="02040503050406030204" pitchFamily="18" charset="0"/>
+                      </a:rPr>
+                      <m:t>=</m:t>
+                    </m:r>
+                    <m:r>
+                      <a:rPr lang="en-US" b="0" i="1" smtClean="0">
+                        <a:latin typeface="Cambria Math" panose="02040503050406030204" pitchFamily="18" charset="0"/>
+                      </a:rPr>
+                      <m:t>𝑏</m:t>
+                    </m:r>
+                    <m:r>
+                      <a:rPr lang="en-US" b="0" i="1" smtClean="0">
+                        <a:latin typeface="Cambria Math" panose="02040503050406030204" pitchFamily="18" charset="0"/>
+                      </a:rPr>
+                      <m:t>1</m:t>
+                    </m:r>
+                    <m:r>
+                      <a:rPr lang="en-US" sz="2400" i="1">
+                        <a:latin typeface="Cambria Math"/>
+                      </a:rPr>
+                      <m:t>×</m:t>
+                    </m:r>
+                    <m:sSup>
+                      <m:sSupPr>
+                        <m:ctrlPr>
+                          <a:rPr lang="en-US" sz="2400" i="1">
+                            <a:latin typeface="Cambria Math" panose="02040503050406030204" pitchFamily="18" charset="0"/>
+                          </a:rPr>
+                        </m:ctrlPr>
+                      </m:sSupPr>
+                      <m:e>
+                        <m:r>
+                          <a:rPr lang="en-US" sz="2400" i="1">
+                            <a:latin typeface="Cambria Math"/>
+                          </a:rPr>
+                          <m:t>2</m:t>
+                        </m:r>
+                      </m:e>
+                      <m:sup>
+                        <m:r>
+                          <a:rPr lang="en-US" sz="2400" i="1">
+                            <a:latin typeface="Cambria Math"/>
+                          </a:rPr>
+                          <m:t>−</m:t>
+                        </m:r>
+                        <m:r>
+                          <a:rPr lang="en-US" sz="2400" i="1">
+                            <a:latin typeface="Cambria Math"/>
+                          </a:rPr>
+                          <m:t>1</m:t>
+                        </m:r>
+                      </m:sup>
+                    </m:sSup>
+                    <m:r>
+                      <a:rPr lang="en-US" sz="2400" i="1">
+                        <a:latin typeface="Cambria Math"/>
+                      </a:rPr>
+                      <m:t>+</m:t>
+                    </m:r>
+                    <m:r>
+                      <a:rPr lang="en-US" sz="2400" b="0" i="1" smtClean="0">
+                        <a:latin typeface="Cambria Math" panose="02040503050406030204" pitchFamily="18" charset="0"/>
+                      </a:rPr>
+                      <m:t>𝑏</m:t>
+                    </m:r>
+                    <m:r>
+                      <a:rPr lang="en-US" sz="2400" b="0" i="1" smtClean="0">
+                        <a:latin typeface="Cambria Math" panose="02040503050406030204" pitchFamily="18" charset="0"/>
+                      </a:rPr>
+                      <m:t>2</m:t>
+                    </m:r>
+                    <m:r>
+                      <a:rPr lang="en-US" sz="2400" b="0" i="1" smtClean="0">
+                        <a:latin typeface="Cambria Math" panose="02040503050406030204" pitchFamily="18" charset="0"/>
+                      </a:rPr>
+                      <m:t>×</m:t>
+                    </m:r>
+                    <m:sSup>
+                      <m:sSupPr>
+                        <m:ctrlPr>
+                          <a:rPr lang="en-US" sz="2400" i="1">
+                            <a:latin typeface="Cambria Math" panose="02040503050406030204" pitchFamily="18" charset="0"/>
+                          </a:rPr>
+                        </m:ctrlPr>
+                      </m:sSupPr>
+                      <m:e>
+                        <m:r>
+                          <a:rPr lang="en-US" sz="2400" i="1">
+                            <a:latin typeface="Cambria Math"/>
+                          </a:rPr>
+                          <m:t>2</m:t>
+                        </m:r>
+                      </m:e>
+                      <m:sup>
+                        <m:r>
+                          <a:rPr lang="en-US" sz="2400" i="1">
+                            <a:latin typeface="Cambria Math"/>
+                          </a:rPr>
+                          <m:t>−</m:t>
+                        </m:r>
+                        <m:r>
+                          <a:rPr lang="en-US" sz="2400" i="1">
+                            <a:latin typeface="Cambria Math"/>
+                          </a:rPr>
+                          <m:t>2</m:t>
+                        </m:r>
+                      </m:sup>
+                    </m:sSup>
+                    <m:r>
+                      <a:rPr lang="en-US" sz="2400" i="1">
+                        <a:latin typeface="Cambria Math"/>
+                      </a:rPr>
+                      <m:t>+</m:t>
+                    </m:r>
+                    <m:r>
+                      <a:rPr lang="en-US" sz="2400" b="0" i="1" smtClean="0">
+                        <a:latin typeface="Cambria Math" panose="02040503050406030204" pitchFamily="18" charset="0"/>
+                      </a:rPr>
+                      <m:t>𝑏</m:t>
+                    </m:r>
+                    <m:r>
+                      <a:rPr lang="en-US" sz="2400" b="0" i="1" smtClean="0">
+                        <a:latin typeface="Cambria Math" panose="02040503050406030204" pitchFamily="18" charset="0"/>
+                      </a:rPr>
+                      <m:t>3</m:t>
+                    </m:r>
+                    <m:r>
+                      <a:rPr lang="en-US" sz="2400" b="0" i="1" smtClean="0">
+                        <a:latin typeface="Cambria Math" panose="02040503050406030204" pitchFamily="18" charset="0"/>
+                      </a:rPr>
+                      <m:t>×</m:t>
+                    </m:r>
+                    <m:sSup>
+                      <m:sSupPr>
+                        <m:ctrlPr>
+                          <a:rPr lang="en-US" sz="2400" i="1">
+                            <a:latin typeface="Cambria Math" panose="02040503050406030204" pitchFamily="18" charset="0"/>
+                          </a:rPr>
+                        </m:ctrlPr>
+                      </m:sSupPr>
+                      <m:e>
+                        <m:r>
+                          <a:rPr lang="en-US" sz="2400" i="1">
+                            <a:latin typeface="Cambria Math"/>
+                          </a:rPr>
+                          <m:t>2</m:t>
+                        </m:r>
+                      </m:e>
+                      <m:sup>
+                        <m:r>
+                          <a:rPr lang="en-US" sz="2400" i="1">
+                            <a:latin typeface="Cambria Math"/>
+                          </a:rPr>
+                          <m:t>−</m:t>
+                        </m:r>
+                        <m:r>
+                          <a:rPr lang="en-US" sz="2400" i="1">
+                            <a:latin typeface="Cambria Math"/>
+                          </a:rPr>
+                          <m:t>3</m:t>
+                        </m:r>
+                      </m:sup>
+                    </m:sSup>
+                    <m:r>
+                      <a:rPr lang="en-US" sz="2400" i="1">
+                        <a:latin typeface="Cambria Math"/>
+                      </a:rPr>
+                      <m:t>+</m:t>
+                    </m:r>
+                    <m:r>
+                      <a:rPr lang="en-US" sz="2400" b="0" i="1" smtClean="0">
+                        <a:latin typeface="Cambria Math" panose="02040503050406030204" pitchFamily="18" charset="0"/>
+                      </a:rPr>
+                      <m:t>𝑏</m:t>
+                    </m:r>
+                    <m:r>
+                      <a:rPr lang="en-US" sz="2400" b="0" i="1" smtClean="0">
+                        <a:latin typeface="Cambria Math" panose="02040503050406030204" pitchFamily="18" charset="0"/>
+                      </a:rPr>
+                      <m:t>4</m:t>
+                    </m:r>
+                    <m:r>
+                      <a:rPr lang="en-US" sz="2400" b="0" i="1" smtClean="0">
+                        <a:latin typeface="Cambria Math" panose="02040503050406030204" pitchFamily="18" charset="0"/>
+                      </a:rPr>
+                      <m:t>×</m:t>
+                    </m:r>
+                    <m:sSup>
+                      <m:sSupPr>
+                        <m:ctrlPr>
+                          <a:rPr lang="en-US" sz="2400" i="1">
+                            <a:latin typeface="Cambria Math" panose="02040503050406030204" pitchFamily="18" charset="0"/>
+                          </a:rPr>
+                        </m:ctrlPr>
+                      </m:sSupPr>
+                      <m:e>
+                        <m:r>
+                          <a:rPr lang="en-US" sz="2400" i="1">
+                            <a:latin typeface="Cambria Math"/>
+                          </a:rPr>
+                          <m:t>2</m:t>
+                        </m:r>
+                      </m:e>
+                      <m:sup>
+                        <m:r>
+                          <a:rPr lang="en-US" sz="2400" i="1">
+                            <a:latin typeface="Cambria Math"/>
+                          </a:rPr>
+                          <m:t>−</m:t>
+                        </m:r>
+                        <m:r>
+                          <a:rPr lang="en-US" sz="2400" i="1">
+                            <a:latin typeface="Cambria Math"/>
+                          </a:rPr>
+                          <m:t>4</m:t>
+                        </m:r>
+                      </m:sup>
+                    </m:sSup>
+                    <m:r>
+                      <a:rPr lang="en-US" sz="2400" b="0" i="1" smtClean="0">
+                        <a:latin typeface="Cambria Math" panose="02040503050406030204" pitchFamily="18" charset="0"/>
+                      </a:rPr>
+                      <m:t>+…</m:t>
+                    </m:r>
+                  </m:oMath>
+                </a14:m>
+                <a:endParaRPr lang="en-US" dirty="0"/>
+              </a:p>
+              <a:p>
+                <a:pPr lvl="1"/>
+                <a14:m>
+                  <m:oMath xmlns:m="http://schemas.openxmlformats.org/officeDocument/2006/math">
+                    <m:r>
+                      <a:rPr lang="en-US" i="1">
+                        <a:latin typeface="Cambria Math"/>
+                      </a:rPr>
+                      <m:t>0</m:t>
+                    </m:r>
+                    <m:r>
+                      <a:rPr lang="en-US" i="1">
+                        <a:latin typeface="Cambria Math"/>
+                      </a:rPr>
+                      <m:t>.</m:t>
+                    </m:r>
+                    <m:r>
+                      <a:rPr lang="en-US" b="0" i="1" smtClean="0">
+                        <a:latin typeface="Cambria Math" panose="02040503050406030204" pitchFamily="18" charset="0"/>
+                      </a:rPr>
+                      <m:t>3</m:t>
+                    </m:r>
+                    <m:r>
+                      <a:rPr lang="en-US" i="1">
+                        <a:latin typeface="Cambria Math"/>
+                      </a:rPr>
+                      <m:t>125</m:t>
+                    </m:r>
+                    <m:r>
+                      <a:rPr lang="en-US" i="1">
+                        <a:latin typeface="Cambria Math"/>
+                      </a:rPr>
+                      <m:t>×</m:t>
+                    </m:r>
+                    <m:r>
+                      <a:rPr lang="en-US" i="1">
+                        <a:latin typeface="Cambria Math"/>
+                      </a:rPr>
+                      <m:t>2</m:t>
+                    </m:r>
+                    <m:r>
+                      <a:rPr lang="en-US" i="1">
+                        <a:latin typeface="Cambria Math"/>
+                      </a:rPr>
+                      <m:t>=</m:t>
+                    </m:r>
+                    <m:r>
+                      <a:rPr lang="en-US" b="0" i="1" smtClean="0">
+                        <a:latin typeface="Cambria Math" panose="02040503050406030204" pitchFamily="18" charset="0"/>
+                      </a:rPr>
+                      <m:t>0</m:t>
+                    </m:r>
+                    <m:r>
+                      <a:rPr lang="en-US" i="1">
+                        <a:latin typeface="Cambria Math"/>
+                      </a:rPr>
+                      <m:t>.</m:t>
+                    </m:r>
+                    <m:r>
+                      <a:rPr lang="en-US" i="1">
+                        <a:latin typeface="Cambria Math"/>
+                      </a:rPr>
+                      <m:t>625</m:t>
+                    </m:r>
+                    <m:r>
+                      <a:rPr lang="en-US" i="1">
+                        <a:latin typeface="Cambria Math"/>
+                      </a:rPr>
+                      <m:t>=</m:t>
+                    </m:r>
+                    <m:r>
+                      <a:rPr lang="en-US" b="0" i="1" smtClean="0">
+                        <a:latin typeface="Cambria Math" panose="02040503050406030204" pitchFamily="18" charset="0"/>
+                      </a:rPr>
+                      <m:t>0</m:t>
+                    </m:r>
+                    <m:r>
+                      <a:rPr lang="en-US" i="1">
+                        <a:latin typeface="Cambria Math"/>
+                      </a:rPr>
+                      <m:t>+</m:t>
+                    </m:r>
+                    <m:r>
+                      <a:rPr lang="en-US" i="1">
+                        <a:latin typeface="Cambria Math"/>
+                      </a:rPr>
+                      <m:t>0</m:t>
+                    </m:r>
+                    <m:r>
+                      <a:rPr lang="en-US" i="1">
+                        <a:latin typeface="Cambria Math"/>
+                      </a:rPr>
+                      <m:t>.</m:t>
+                    </m:r>
+                    <m:r>
+                      <a:rPr lang="en-US" i="1">
+                        <a:latin typeface="Cambria Math"/>
+                      </a:rPr>
+                      <m:t>625</m:t>
+                    </m:r>
+                  </m:oMath>
+                </a14:m>
+                <a:r>
+                  <a:rPr lang="en-US" dirty="0"/>
+                  <a:t> =&gt; b1 = 0</a:t>
+                </a:r>
+              </a:p>
+              <a:p>
+                <a:pPr lvl="1"/>
+                <a14:m>
+                  <m:oMath xmlns:m="http://schemas.openxmlformats.org/officeDocument/2006/math">
+                    <m:r>
+                      <a:rPr lang="en-US" i="1">
+                        <a:latin typeface="Cambria Math"/>
+                      </a:rPr>
+                      <m:t>0</m:t>
+                    </m:r>
+                    <m:r>
+                      <a:rPr lang="en-US" i="1">
+                        <a:latin typeface="Cambria Math"/>
+                      </a:rPr>
+                      <m:t>.</m:t>
+                    </m:r>
+                    <m:r>
+                      <a:rPr lang="en-US" i="1">
+                        <a:latin typeface="Cambria Math"/>
+                      </a:rPr>
+                      <m:t>625</m:t>
+                    </m:r>
+                    <m:r>
+                      <a:rPr lang="en-US" i="1">
+                        <a:latin typeface="Cambria Math"/>
+                      </a:rPr>
+                      <m:t>×</m:t>
+                    </m:r>
+                    <m:r>
+                      <a:rPr lang="en-US" i="1">
+                        <a:latin typeface="Cambria Math"/>
+                      </a:rPr>
+                      <m:t>2</m:t>
+                    </m:r>
+                    <m:r>
+                      <a:rPr lang="en-US" i="1">
+                        <a:latin typeface="Cambria Math"/>
+                      </a:rPr>
+                      <m:t>=</m:t>
+                    </m:r>
+                    <m:r>
+                      <a:rPr lang="en-US" i="1">
+                        <a:latin typeface="Cambria Math"/>
+                      </a:rPr>
+                      <m:t>1</m:t>
+                    </m:r>
+                    <m:r>
+                      <a:rPr lang="en-US" i="1">
+                        <a:latin typeface="Cambria Math"/>
+                      </a:rPr>
+                      <m:t>.</m:t>
+                    </m:r>
+                    <m:r>
+                      <a:rPr lang="en-US" i="1">
+                        <a:latin typeface="Cambria Math"/>
+                      </a:rPr>
+                      <m:t>25</m:t>
+                    </m:r>
+                    <m:r>
+                      <a:rPr lang="en-US" i="1">
+                        <a:latin typeface="Cambria Math"/>
+                      </a:rPr>
+                      <m:t>=</m:t>
+                    </m:r>
+                    <m:r>
+                      <a:rPr lang="en-US" i="1">
+                        <a:latin typeface="Cambria Math"/>
+                      </a:rPr>
+                      <m:t>1</m:t>
+                    </m:r>
+                    <m:r>
+                      <a:rPr lang="en-US" i="1">
+                        <a:latin typeface="Cambria Math"/>
+                      </a:rPr>
+                      <m:t>+</m:t>
+                    </m:r>
+                    <m:r>
+                      <a:rPr lang="en-US" i="1">
+                        <a:latin typeface="Cambria Math"/>
+                      </a:rPr>
+                      <m:t>0</m:t>
+                    </m:r>
+                    <m:r>
+                      <a:rPr lang="en-US" i="1">
+                        <a:latin typeface="Cambria Math"/>
+                      </a:rPr>
+                      <m:t>.</m:t>
+                    </m:r>
+                    <m:r>
+                      <a:rPr lang="en-US" i="1">
+                        <a:latin typeface="Cambria Math"/>
+                      </a:rPr>
+                      <m:t>25</m:t>
+                    </m:r>
+                  </m:oMath>
+                </a14:m>
+                <a:r>
+                  <a:rPr lang="en-US" dirty="0"/>
+                  <a:t> =&gt; b2 = 1</a:t>
+                </a:r>
+              </a:p>
+              <a:p>
+                <a:pPr lvl="1"/>
+                <a14:m>
+                  <m:oMath xmlns:m="http://schemas.openxmlformats.org/officeDocument/2006/math">
+                    <m:r>
+                      <a:rPr lang="en-US" i="1">
+                        <a:latin typeface="Cambria Math"/>
+                      </a:rPr>
+                      <m:t>0</m:t>
+                    </m:r>
+                    <m:r>
+                      <a:rPr lang="en-US" i="1">
+                        <a:latin typeface="Cambria Math"/>
+                      </a:rPr>
+                      <m:t>.</m:t>
+                    </m:r>
+                    <m:r>
+                      <a:rPr lang="en-US" i="1">
+                        <a:latin typeface="Cambria Math"/>
+                      </a:rPr>
+                      <m:t>25</m:t>
+                    </m:r>
+                    <m:r>
+                      <a:rPr lang="en-US" i="1">
+                        <a:latin typeface="Cambria Math"/>
+                      </a:rPr>
+                      <m:t>×</m:t>
+                    </m:r>
+                    <m:r>
+                      <a:rPr lang="en-US" i="1">
+                        <a:latin typeface="Cambria Math"/>
+                      </a:rPr>
+                      <m:t>2</m:t>
+                    </m:r>
+                    <m:r>
+                      <a:rPr lang="en-US" i="1">
+                        <a:latin typeface="Cambria Math"/>
+                      </a:rPr>
+                      <m:t>=</m:t>
+                    </m:r>
+                    <m:r>
+                      <a:rPr lang="en-US" i="1">
+                        <a:latin typeface="Cambria Math"/>
+                      </a:rPr>
+                      <m:t>0</m:t>
+                    </m:r>
+                    <m:r>
+                      <a:rPr lang="en-US" i="1">
+                        <a:latin typeface="Cambria Math"/>
+                      </a:rPr>
+                      <m:t>.</m:t>
+                    </m:r>
+                    <m:r>
+                      <a:rPr lang="en-US" i="1">
+                        <a:latin typeface="Cambria Math"/>
+                      </a:rPr>
+                      <m:t>5</m:t>
+                    </m:r>
+                    <m:r>
+                      <a:rPr lang="en-US" i="1">
+                        <a:latin typeface="Cambria Math"/>
+                      </a:rPr>
+                      <m:t>=</m:t>
+                    </m:r>
+                    <m:r>
+                      <a:rPr lang="en-US" i="1">
+                        <a:latin typeface="Cambria Math"/>
+                      </a:rPr>
+                      <m:t>0</m:t>
+                    </m:r>
+                    <m:r>
+                      <a:rPr lang="en-US" i="1">
+                        <a:latin typeface="Cambria Math"/>
+                      </a:rPr>
+                      <m:t>+</m:t>
+                    </m:r>
+                    <m:r>
+                      <a:rPr lang="en-US" i="1">
+                        <a:latin typeface="Cambria Math"/>
+                      </a:rPr>
+                      <m:t>0</m:t>
+                    </m:r>
+                    <m:r>
+                      <a:rPr lang="en-US" i="1">
+                        <a:latin typeface="Cambria Math"/>
+                      </a:rPr>
+                      <m:t>.</m:t>
+                    </m:r>
+                    <m:r>
+                      <a:rPr lang="en-US" i="1">
+                        <a:latin typeface="Cambria Math"/>
+                      </a:rPr>
+                      <m:t>5</m:t>
+                    </m:r>
+                  </m:oMath>
+                </a14:m>
+                <a:r>
+                  <a:rPr lang="en-US" dirty="0"/>
+                  <a:t> =&gt; b3 = 0</a:t>
+                </a:r>
+              </a:p>
+              <a:p>
+                <a:pPr lvl="1"/>
+                <a14:m>
+                  <m:oMath xmlns:m="http://schemas.openxmlformats.org/officeDocument/2006/math">
+                    <m:r>
+                      <a:rPr lang="en-US" i="1">
+                        <a:latin typeface="Cambria Math"/>
+                      </a:rPr>
+                      <m:t>0</m:t>
+                    </m:r>
+                    <m:r>
+                      <a:rPr lang="en-US" i="1">
+                        <a:latin typeface="Cambria Math"/>
+                      </a:rPr>
+                      <m:t>.</m:t>
+                    </m:r>
+                    <m:r>
+                      <a:rPr lang="en-US" i="1">
+                        <a:latin typeface="Cambria Math"/>
+                      </a:rPr>
+                      <m:t>5</m:t>
+                    </m:r>
+                    <m:r>
+                      <a:rPr lang="en-US" i="1">
+                        <a:latin typeface="Cambria Math"/>
+                      </a:rPr>
+                      <m:t>×</m:t>
+                    </m:r>
+                    <m:r>
+                      <a:rPr lang="en-US" i="1">
+                        <a:latin typeface="Cambria Math"/>
+                      </a:rPr>
+                      <m:t>2</m:t>
+                    </m:r>
+                    <m:r>
+                      <a:rPr lang="en-US" i="1">
+                        <a:latin typeface="Cambria Math"/>
+                      </a:rPr>
+                      <m:t>=</m:t>
+                    </m:r>
+                    <m:r>
+                      <a:rPr lang="en-US" i="1">
+                        <a:latin typeface="Cambria Math"/>
+                      </a:rPr>
+                      <m:t>1</m:t>
+                    </m:r>
+                  </m:oMath>
+                </a14:m>
+                <a:r>
+                  <a:rPr lang="en-US" dirty="0"/>
+                  <a:t> =&gt; b4 = 1</a:t>
+                </a:r>
+              </a:p>
+              <a:p>
+                <a:r>
+                  <a:rPr lang="en-US" dirty="0">
+                    <a:latin typeface="Consolas" panose="020B0609020204030204" pitchFamily="49" charset="0"/>
+                    <a:cs typeface="Consolas" panose="020B0609020204030204" pitchFamily="49" charset="0"/>
+                  </a:rPr>
+                  <a:t>5.25</a:t>
+                </a:r>
+                <a:r>
+                  <a:rPr lang="en-US" dirty="0"/>
+                  <a:t> = </a:t>
                 </a:r>
                 <a:r>
                   <a:rPr lang="en-US" dirty="0">
@@ -5188,7 +6325,7 @@
                     <a:latin typeface="Consolas" panose="020B0609020204030204" pitchFamily="49" charset="0"/>
                     <a:cs typeface="Consolas" panose="020B0609020204030204" pitchFamily="49" charset="0"/>
                   </a:rPr>
-                  <a:t>1</a:t>
+                  <a:t>0</a:t>
                 </a:r>
                 <a:r>
                   <a:rPr lang="en-US" dirty="0">
@@ -5198,7 +6335,7 @@
                     <a:latin typeface="Consolas" panose="020B0609020204030204" pitchFamily="49" charset="0"/>
                     <a:cs typeface="Consolas" panose="020B0609020204030204" pitchFamily="49" charset="0"/>
                   </a:rPr>
-                  <a:t>00010001</a:t>
+                  <a:t>10000001</a:t>
                 </a:r>
                 <a:r>
                   <a:rPr lang="en-US" dirty="0">
@@ -5208,265 +6345,12 @@
                     <a:latin typeface="Consolas" panose="020B0609020204030204" pitchFamily="49" charset="0"/>
                     <a:cs typeface="Consolas" panose="020B0609020204030204" pitchFamily="49" charset="0"/>
                   </a:rPr>
-                  <a:t>00010001000000000000000</a:t>
-                </a:r>
-              </a:p>
-              <a:p>
-                <a:r>
-                  <a:rPr lang="en-US" sz="2800" dirty="0"/>
-                  <a:t>Sign = </a:t>
+                  <a:t>01010000000000000000000</a:t>
                 </a:r>
                 <a:r>
-                  <a:rPr lang="en-US" sz="2800" dirty="0">
-                    <a:latin typeface="Consolas" panose="020B0609020204030204" pitchFamily="49" charset="0"/>
-                    <a:cs typeface="Consolas" panose="020B0609020204030204" pitchFamily="49" charset="0"/>
-                  </a:rPr>
-                  <a:t>1</a:t>
+                  <a:rPr lang="en-US" dirty="0"/>
+                  <a:t> in binary</a:t>
                 </a:r>
-              </a:p>
-              <a:p>
-                <a:r>
-                  <a:rPr lang="en-US" sz="2800" dirty="0"/>
-                  <a:t>Exponent = </a:t>
-                </a:r>
-                <a14:m>
-                  <m:oMath xmlns:m="http://schemas.openxmlformats.org/officeDocument/2006/math">
-                    <m:sSub>
-                      <m:sSubPr>
-                        <m:ctrlPr>
-                          <a:rPr lang="en-US" sz="2800" i="1">
-                            <a:latin typeface="Cambria Math" panose="02040503050406030204" pitchFamily="18" charset="0"/>
-                          </a:rPr>
-                        </m:ctrlPr>
-                      </m:sSubPr>
-                      <m:e>
-                        <m:r>
-                          <a:rPr lang="en-US" sz="2800" i="1">
-                            <a:latin typeface="Cambria Math" panose="02040503050406030204" pitchFamily="18" charset="0"/>
-                          </a:rPr>
-                          <m:t>00010001</m:t>
-                        </m:r>
-                      </m:e>
-                      <m:sub>
-                        <m:r>
-                          <a:rPr lang="en-US" sz="2800" i="1">
-                            <a:latin typeface="Cambria Math"/>
-                          </a:rPr>
-                          <m:t>2</m:t>
-                        </m:r>
-                      </m:sub>
-                    </m:sSub>
-                    <m:r>
-                      <a:rPr lang="en-US" sz="2800" i="1">
-                        <a:latin typeface="Cambria Math"/>
-                      </a:rPr>
-                      <m:t>=1</m:t>
-                    </m:r>
-                    <m:r>
-                      <a:rPr lang="en-US" sz="2800" b="0" i="1" smtClean="0">
-                        <a:latin typeface="Cambria Math" panose="02040503050406030204" pitchFamily="18" charset="0"/>
-                      </a:rPr>
-                      <m:t>7</m:t>
-                    </m:r>
-                  </m:oMath>
-                </a14:m>
-                <a:endParaRPr lang="en-US" sz="2800" dirty="0"/>
-              </a:p>
-              <a:p>
-                <a:r>
-                  <a:rPr lang="en-US" sz="2800" dirty="0"/>
-                  <a:t>Fraction = </a:t>
-                </a:r>
-                <a14:m/>
-              </a:p>
-              <a:p>
-                <a:endParaRPr lang="en-US" sz="2800" i="1" dirty="0">
-                  <a:latin typeface="Cambria Math" panose="02040503050406030204" pitchFamily="18" charset="0"/>
-                </a:endParaRPr>
-              </a:p>
-              <a:p>
-                <a:pPr marL="0" indent="0">
-                  <a:buNone/>
-                </a:pPr>
-                <a14:m>
-                  <m:oMathPara xmlns:m="http://schemas.openxmlformats.org/officeDocument/2006/math">
-                    <m:oMathParaPr>
-                      <m:jc m:val="centerGroup"/>
-                    </m:oMathParaPr>
-                    <m:oMath xmlns:m="http://schemas.openxmlformats.org/officeDocument/2006/math">
-                      <m:r>
-                        <m:rPr>
-                          <m:aln/>
-                        </m:rPr>
-                        <a:rPr lang="en-US" sz="2800" i="1" smtClean="0">
-                          <a:latin typeface="Cambria Math"/>
-                        </a:rPr>
-                        <m:t>=</m:t>
-                      </m:r>
-                      <m:r>
-                        <a:rPr lang="en-US" sz="2800" b="0" i="1" smtClean="0">
-                          <a:latin typeface="Cambria Math" panose="02040503050406030204" pitchFamily="18" charset="0"/>
-                        </a:rPr>
-                        <m:t>−1</m:t>
-                      </m:r>
-                      <m:r>
-                        <a:rPr lang="en-US" sz="2800" i="1">
-                          <a:latin typeface="Cambria Math"/>
-                        </a:rPr>
-                        <m:t>×</m:t>
-                      </m:r>
-                      <m:d>
-                        <m:dPr>
-                          <m:ctrlPr>
-                            <a:rPr lang="en-US" sz="2800" i="1" smtClean="0">
-                              <a:latin typeface="Cambria Math" panose="02040503050406030204" pitchFamily="18" charset="0"/>
-                            </a:rPr>
-                          </m:ctrlPr>
-                        </m:dPr>
-                        <m:e>
-                          <m:r>
-                            <a:rPr lang="en-US" sz="2800" i="1">
-                              <a:latin typeface="Cambria Math"/>
-                            </a:rPr>
-                            <m:t>1</m:t>
-                          </m:r>
-                          <m:r>
-                            <a:rPr lang="en-US" sz="2800" b="0" i="1" smtClean="0">
-                              <a:latin typeface="Cambria Math" panose="02040503050406030204" pitchFamily="18" charset="0"/>
-                            </a:rPr>
-                            <m:t>+</m:t>
-                          </m:r>
-                          <m:r>
-                            <a:rPr lang="en-US" sz="2800" i="1">
-                              <a:latin typeface="Cambria Math" panose="02040503050406030204" pitchFamily="18" charset="0"/>
-                            </a:rPr>
-                            <m:t>0.06640625</m:t>
-                          </m:r>
-                        </m:e>
-                      </m:d>
-                      <m:r>
-                        <a:rPr lang="en-US" sz="2800" i="1">
-                          <a:latin typeface="Cambria Math"/>
-                        </a:rPr>
-                        <m:t>×</m:t>
-                      </m:r>
-                      <m:sSup>
-                        <m:sSupPr>
-                          <m:ctrlPr>
-                            <a:rPr lang="en-US" sz="2800" i="1">
-                              <a:latin typeface="Cambria Math" panose="02040503050406030204" pitchFamily="18" charset="0"/>
-                            </a:rPr>
-                          </m:ctrlPr>
-                        </m:sSupPr>
-                        <m:e>
-                          <m:r>
-                            <a:rPr lang="en-US" sz="2800" i="1">
-                              <a:latin typeface="Cambria Math"/>
-                            </a:rPr>
-                            <m:t>2</m:t>
-                          </m:r>
-                        </m:e>
-                        <m:sup>
-                          <m:r>
-                            <a:rPr lang="en-US" sz="2800" i="1">
-                              <a:latin typeface="Cambria Math"/>
-                            </a:rPr>
-                            <m:t>1</m:t>
-                          </m:r>
-                          <m:r>
-                            <a:rPr lang="en-US" sz="2800" b="0" i="1" smtClean="0">
-                              <a:latin typeface="Cambria Math" panose="02040503050406030204" pitchFamily="18" charset="0"/>
-                            </a:rPr>
-                            <m:t>7</m:t>
-                          </m:r>
-                          <m:r>
-                            <a:rPr lang="en-US" sz="2800" i="1">
-                              <a:latin typeface="Cambria Math"/>
-                            </a:rPr>
-                            <m:t>−127</m:t>
-                          </m:r>
-                        </m:sup>
-                      </m:sSup>
-                    </m:oMath>
-                    <m:oMath xmlns:m="http://schemas.openxmlformats.org/officeDocument/2006/math">
-                      <m:r>
-                        <m:rPr>
-                          <m:aln/>
-                        </m:rPr>
-                        <a:rPr lang="en-US" sz="2800" i="1">
-                          <a:latin typeface="Cambria Math"/>
-                        </a:rPr>
-                        <m:t>=</m:t>
-                      </m:r>
-                      <m:r>
-                        <a:rPr lang="en-US" sz="2800" i="1">
-                          <a:latin typeface="Cambria Math"/>
-                        </a:rPr>
-                        <m:t>−</m:t>
-                      </m:r>
-                      <m:r>
-                        <a:rPr lang="en-US" sz="2800" b="0" i="1" smtClean="0">
-                          <a:latin typeface="Cambria Math" panose="02040503050406030204" pitchFamily="18" charset="0"/>
-                        </a:rPr>
-                        <m:t>1</m:t>
-                      </m:r>
-                      <m:r>
-                        <a:rPr lang="en-US" sz="2800" i="1">
-                          <a:latin typeface="Cambria Math" panose="02040503050406030204" pitchFamily="18" charset="0"/>
-                        </a:rPr>
-                        <m:t>.06640625</m:t>
-                      </m:r>
-                      <m:r>
-                        <a:rPr lang="en-US" sz="2800" i="1">
-                          <a:latin typeface="Cambria Math"/>
-                        </a:rPr>
-                        <m:t>×</m:t>
-                      </m:r>
-                      <m:sSup>
-                        <m:sSupPr>
-                          <m:ctrlPr>
-                            <a:rPr lang="en-US" sz="2800" i="1">
-                              <a:latin typeface="Cambria Math" panose="02040503050406030204" pitchFamily="18" charset="0"/>
-                            </a:rPr>
-                          </m:ctrlPr>
-                        </m:sSupPr>
-                        <m:e>
-                          <m:r>
-                            <a:rPr lang="en-US" sz="2800" i="1">
-                              <a:latin typeface="Cambria Math"/>
-                            </a:rPr>
-                            <m:t>2</m:t>
-                          </m:r>
-                        </m:e>
-                        <m:sup>
-                          <m:r>
-                            <a:rPr lang="en-US" sz="2800" b="0" i="1" smtClean="0">
-                              <a:latin typeface="Cambria Math" panose="02040503050406030204" pitchFamily="18" charset="0"/>
-                            </a:rPr>
-                            <m:t>−110</m:t>
-                          </m:r>
-                        </m:sup>
-                      </m:sSup>
-                    </m:oMath>
-                  </m:oMathPara>
-                </a14:m>
-                <a:endParaRPr lang="en-US" dirty="0">
-                  <a:solidFill>
-                    <a:srgbClr val="00B050"/>
-                  </a:solidFill>
-                  <a:latin typeface="Consolas" panose="020B0609020204030204" pitchFamily="49" charset="0"/>
-                </a:endParaRPr>
-              </a:p>
-              <a:p>
-                <a:pPr marL="0" indent="0">
-                  <a:buNone/>
-                </a:pPr>
-                <a:endParaRPr lang="en-US" dirty="0">
-                  <a:solidFill>
-                    <a:srgbClr val="00B050"/>
-                  </a:solidFill>
-                  <a:latin typeface="Consolas" panose="020B0609020204030204" pitchFamily="49" charset="0"/>
-                </a:endParaRPr>
               </a:p>
             </p:txBody>
           </p:sp>
@@ -5474,10 +6358,10 @@
         <mc:Fallback>
           <p:sp>
             <p:nvSpPr>
-              <p:cNvPr id="4" name="Content Placeholder 3">
+              <p:cNvPr id="6" name="Content Placeholder 3">
                 <a:extLst>
                   <a:ext uri="{FF2B5EF4-FFF2-40B4-BE49-F238E27FC236}">
-                    <a16:creationId xmlns:a16="http://schemas.microsoft.com/office/drawing/2014/main" id="{212C4FEB-6980-3FA2-E64E-87F97E607784}"/>
+                    <a16:creationId xmlns:a16="http://schemas.microsoft.com/office/drawing/2014/main" id="{D97226D9-37FF-0AC2-DF1D-4E18E3B8EB8D}"/>
                   </a:ext>
                 </a:extLst>
               </p:cNvPr>
@@ -5489,10 +6373,14 @@
               </p:nvPr>
             </p:nvSpPr>
             <p:spPr>
+              <a:xfrm>
+                <a:off x="990600" y="1143000"/>
+                <a:ext cx="10363200" cy="5013960"/>
+              </a:xfrm>
               <a:blipFill>
-                <a:blip r:embed="rId3"/>
+                <a:blip r:embed="rId2"/>
                 <a:stretch>
-                  <a:fillRect l="-556" t="-1235"/>
+                  <a:fillRect l="-412" t="-2433" b="-2311"/>
                 </a:stretch>
               </a:blipFill>
             </p:spPr>
@@ -5514,7 +6402,7 @@
     </p:spTree>
     <p:extLst>
       <p:ext uri="{BB962C8B-B14F-4D97-AF65-F5344CB8AC3E}">
-        <p14:creationId xmlns:p14="http://schemas.microsoft.com/office/powerpoint/2010/main" val="2456191673"/>
+        <p14:creationId xmlns:p14="http://schemas.microsoft.com/office/powerpoint/2010/main" val="1279124568"/>
       </p:ext>
     </p:extLst>
   </p:cSld>
@@ -5532,7 +6420,7 @@
         <p:cNvPr id="1" name="">
           <a:extLst>
             <a:ext uri="{FF2B5EF4-FFF2-40B4-BE49-F238E27FC236}">
-              <a16:creationId xmlns:a16="http://schemas.microsoft.com/office/drawing/2014/main" id="{D01DE315-13A9-17C0-2BCF-2EDA2B04E1DE}"/>
+              <a16:creationId xmlns:a16="http://schemas.microsoft.com/office/drawing/2014/main" id="{3E22E42E-2B8D-9836-5921-AD720559B115}"/>
             </a:ext>
           </a:extLst>
         </p:cNvPr>
@@ -5552,7 +6440,7 @@
           <p:cNvPr id="2" name="Title 1">
             <a:extLst>
               <a:ext uri="{FF2B5EF4-FFF2-40B4-BE49-F238E27FC236}">
-                <a16:creationId xmlns:a16="http://schemas.microsoft.com/office/drawing/2014/main" id="{1F000EC5-11FF-B40D-E96F-A868D391149B}"/>
+                <a16:creationId xmlns:a16="http://schemas.microsoft.com/office/drawing/2014/main" id="{5EB89A4B-4426-8C55-E290-2091750F2D4C}"/>
               </a:ext>
             </a:extLst>
           </p:cNvPr>
@@ -5566,32 +6454,14 @@
         <p:spPr/>
         <p:txBody>
           <a:bodyPr>
-            <a:normAutofit fontScale="90000"/>
+            <a:normAutofit/>
           </a:bodyPr>
           <a:lstStyle/>
           <a:p>
             <a:r>
-              <a:rPr lang="en-US" b="1" dirty="0"/>
-              <a:t>Decoding </a:t>
+              <a:rPr lang="en-US" dirty="0"/>
+              <a:t>Decoding 01000000101010000000000000000000</a:t>
             </a:r>
-            <a:r>
-              <a:rPr lang="en-US" sz="3600" b="1" dirty="0">
-                <a:solidFill>
-                  <a:srgbClr val="C00000"/>
-                </a:solidFill>
-                <a:latin typeface="Consolas" panose="020B0609020204030204" pitchFamily="49" charset="0"/>
-                <a:cs typeface="Consolas" panose="020B0609020204030204" pitchFamily="49" charset="0"/>
-              </a:rPr>
-              <a:t>0x42F6E979 </a:t>
-            </a:r>
-            <a:br>
-              <a:rPr lang="en-US" b="1" dirty="0"/>
-            </a:br>
-            <a:r>
-              <a:rPr lang="en-US" b="1" dirty="0"/>
-              <a:t>into a floating-point number</a:t>
-            </a:r>
-            <a:endParaRPr lang="en-US" dirty="0"/>
           </a:p>
         </p:txBody>
       </p:sp>
@@ -5600,7 +6470,7 @@
           <p:cNvPr id="3" name="Slide Number Placeholder 2">
             <a:extLst>
               <a:ext uri="{FF2B5EF4-FFF2-40B4-BE49-F238E27FC236}">
-                <a16:creationId xmlns:a16="http://schemas.microsoft.com/office/drawing/2014/main" id="{939654E5-F0B9-0DDE-01C7-CF66496BA49C}"/>
+                <a16:creationId xmlns:a16="http://schemas.microsoft.com/office/drawing/2014/main" id="{725F723A-DAE7-5988-4996-CF0E3F48BBCA}"/>
               </a:ext>
             </a:extLst>
           </p:cNvPr>
@@ -5629,10 +6499,10 @@
         <mc:Choice xmlns:a14="http://schemas.microsoft.com/office/drawing/2010/main" Requires="a14">
           <p:sp>
             <p:nvSpPr>
-              <p:cNvPr id="4" name="Content Placeholder 3">
+              <p:cNvPr id="7" name="Content Placeholder 3">
                 <a:extLst>
                   <a:ext uri="{FF2B5EF4-FFF2-40B4-BE49-F238E27FC236}">
-                    <a16:creationId xmlns:a16="http://schemas.microsoft.com/office/drawing/2014/main" id="{8EDF4C76-0367-6082-911A-D9E67CF2968B}"/>
+                    <a16:creationId xmlns:a16="http://schemas.microsoft.com/office/drawing/2014/main" id="{2034EC25-E314-2371-82F2-4FD3DB76022E}"/>
                   </a:ext>
                 </a:extLst>
               </p:cNvPr>
@@ -5643,7 +6513,12 @@
                 <p:ph sz="quarter" idx="1"/>
               </p:nvPr>
             </p:nvSpPr>
-            <p:spPr/>
+            <p:spPr>
+              <a:xfrm>
+                <a:off x="609600" y="1219200"/>
+                <a:ext cx="10972800" cy="4937760"/>
+              </a:xfrm>
+            </p:spPr>
             <p:txBody>
               <a:bodyPr>
                 <a:normAutofit/>
@@ -5657,7 +6532,7 @@
                 <a:r>
                   <a:rPr lang="en-US" dirty="0">
                     <a:solidFill>
-                      <a:srgbClr val="C00000"/>
+                      <a:srgbClr val="FF0000"/>
                     </a:solidFill>
                     <a:latin typeface="Consolas" panose="020B0609020204030204" pitchFamily="49" charset="0"/>
                     <a:cs typeface="Consolas" panose="020B0609020204030204" pitchFamily="49" charset="0"/>
@@ -5672,7 +6547,7 @@
                     <a:latin typeface="Consolas" panose="020B0609020204030204" pitchFamily="49" charset="0"/>
                     <a:cs typeface="Consolas" panose="020B0609020204030204" pitchFamily="49" charset="0"/>
                   </a:rPr>
-                  <a:t>10000101</a:t>
+                  <a:t>10000001</a:t>
                 </a:r>
                 <a:r>
                   <a:rPr lang="en-US" dirty="0">
@@ -5682,7 +6557,7 @@
                     <a:latin typeface="Consolas" panose="020B0609020204030204" pitchFamily="49" charset="0"/>
                     <a:cs typeface="Consolas" panose="020B0609020204030204" pitchFamily="49" charset="0"/>
                   </a:rPr>
-                  <a:t>11101101110100101111001  </a:t>
+                  <a:t>01010000000000000000000  </a:t>
                 </a:r>
               </a:p>
               <a:p>
@@ -5718,7 +6593,7 @@
                           <a:rPr lang="en-US" sz="2800" i="1">
                             <a:latin typeface="Cambria Math" panose="02040503050406030204" pitchFamily="18" charset="0"/>
                           </a:rPr>
-                          <m:t>10000101</m:t>
+                          <m:t>10000001</m:t>
                         </m:r>
                       </m:e>
                       <m:sub>
@@ -5734,7 +6609,13 @@
                       <a:rPr lang="en-US" sz="2800" i="1">
                         <a:latin typeface="Cambria Math"/>
                       </a:rPr>
-                      <m:t>=133</m:t>
+                      <m:t>=</m:t>
+                    </m:r>
+                    <m:r>
+                      <a:rPr lang="en-US" sz="2800" b="0" i="1" smtClean="0">
+                        <a:latin typeface="Cambria Math" panose="02040503050406030204" pitchFamily="18" charset="0"/>
+                      </a:rPr>
+                      <m:t>129</m:t>
                     </m:r>
                   </m:oMath>
                 </a14:m>
@@ -5743,21 +6624,21 @@
               <a:p>
                 <a:r>
                   <a:rPr lang="en-US" sz="2800" dirty="0"/>
-                  <a:t>Fraction = </a:t>
+                  <a:t>Fraction = 2^-2 + 2^-4 </a:t>
                 </a:r>
                 <a14:m>
                   <m:oMath xmlns:m="http://schemas.openxmlformats.org/officeDocument/2006/math">
                     <m:r>
-                      <a:rPr lang="en-US" sz="2800" i="1" smtClean="0">
-                        <a:latin typeface="Cambria Math" panose="02040503050406030204" pitchFamily="18" charset="0"/>
-                      </a:rPr>
-                      <m:t>0</m:t>
-                    </m:r>
-                    <m:r>
                       <a:rPr lang="en-US" sz="2800" i="1">
                         <a:latin typeface="Cambria Math" panose="02040503050406030204" pitchFamily="18" charset="0"/>
                       </a:rPr>
-                      <m:t>.9271249771118164</m:t>
+                      <m:t>=</m:t>
+                    </m:r>
+                    <m:r>
+                      <a:rPr lang="en-US" sz="2800" i="1">
+                        <a:latin typeface="Cambria Math" panose="02040503050406030204" pitchFamily="18" charset="0"/>
+                      </a:rPr>
+                      <m:t>0.3125</m:t>
                     </m:r>
                   </m:oMath>
                 </a14:m>
@@ -5969,13 +6850,651 @@
                             <a:rPr lang="en-US" sz="2800" i="1">
                               <a:latin typeface="Cambria Math" panose="02040503050406030204" pitchFamily="18" charset="0"/>
                             </a:rPr>
-                            <m:t>+</m:t>
+                            <m:t>+0.</m:t>
+                          </m:r>
+                          <m:r>
+                            <a:rPr lang="en-US" sz="2800" b="0" i="1" smtClean="0">
+                              <a:latin typeface="Cambria Math" panose="02040503050406030204" pitchFamily="18" charset="0"/>
+                            </a:rPr>
+                            <m:t>3125</m:t>
+                          </m:r>
+                        </m:e>
+                      </m:d>
+                      <m:r>
+                        <a:rPr lang="en-US" sz="2800" i="1">
+                          <a:latin typeface="Cambria Math"/>
+                        </a:rPr>
+                        <m:t>×</m:t>
+                      </m:r>
+                      <m:sSup>
+                        <m:sSupPr>
+                          <m:ctrlPr>
+                            <a:rPr lang="en-US" sz="2800" i="1">
+                              <a:latin typeface="Cambria Math" panose="02040503050406030204" pitchFamily="18" charset="0"/>
+                            </a:rPr>
+                          </m:ctrlPr>
+                        </m:sSupPr>
+                        <m:e>
+                          <m:r>
+                            <a:rPr lang="en-US" sz="2800" i="1">
+                              <a:latin typeface="Cambria Math"/>
+                            </a:rPr>
+                            <m:t>2</m:t>
+                          </m:r>
+                        </m:e>
+                        <m:sup>
+                          <m:r>
+                            <a:rPr lang="en-US" sz="2800" i="1">
+                              <a:latin typeface="Cambria Math"/>
+                            </a:rPr>
+                            <m:t>1</m:t>
+                          </m:r>
+                          <m:r>
+                            <a:rPr lang="en-US" sz="2800" b="0" i="1" smtClean="0">
+                              <a:latin typeface="Cambria Math" panose="02040503050406030204" pitchFamily="18" charset="0"/>
+                            </a:rPr>
+                            <m:t>29</m:t>
+                          </m:r>
+                          <m:r>
+                            <a:rPr lang="en-US" sz="2800" i="1">
+                              <a:latin typeface="Cambria Math"/>
+                            </a:rPr>
+                            <m:t>−127</m:t>
+                          </m:r>
+                        </m:sup>
+                      </m:sSup>
+                    </m:oMath>
+                    <m:oMath xmlns:m="http://schemas.openxmlformats.org/officeDocument/2006/math">
+                      <m:r>
+                        <m:rPr>
+                          <m:aln/>
+                        </m:rPr>
+                        <a:rPr lang="en-US" sz="2800" i="1">
+                          <a:latin typeface="Cambria Math"/>
+                        </a:rPr>
+                        <m:t>=</m:t>
+                      </m:r>
+                      <m:r>
+                        <a:rPr lang="en-US" sz="2800" b="0" i="1" smtClean="0">
+                          <a:latin typeface="Cambria Math" panose="02040503050406030204" pitchFamily="18" charset="0"/>
+                        </a:rPr>
+                        <m:t>1.3125</m:t>
+                      </m:r>
+                      <m:r>
+                        <a:rPr lang="en-US" sz="2800" i="1">
+                          <a:latin typeface="Cambria Math"/>
+                        </a:rPr>
+                        <m:t>×</m:t>
+                      </m:r>
+                      <m:sSup>
+                        <m:sSupPr>
+                          <m:ctrlPr>
+                            <a:rPr lang="en-US" sz="2800" i="1">
+                              <a:latin typeface="Cambria Math" panose="02040503050406030204" pitchFamily="18" charset="0"/>
+                            </a:rPr>
+                          </m:ctrlPr>
+                        </m:sSupPr>
+                        <m:e>
+                          <m:r>
+                            <a:rPr lang="en-US" sz="2800" i="1">
+                              <a:latin typeface="Cambria Math"/>
+                            </a:rPr>
+                            <m:t>2</m:t>
+                          </m:r>
+                        </m:e>
+                        <m:sup>
+                          <m:r>
+                            <a:rPr lang="en-US" sz="2800" b="0" i="1" smtClean="0">
+                              <a:latin typeface="Cambria Math" panose="02040503050406030204" pitchFamily="18" charset="0"/>
+                            </a:rPr>
+                            <m:t>2</m:t>
+                          </m:r>
+                        </m:sup>
+                      </m:sSup>
+                    </m:oMath>
+                  </m:oMathPara>
+                </a14:m>
+                <a:endParaRPr lang="en-US" sz="2800" i="1" dirty="0">
+                  <a:latin typeface="Cambria Math" panose="02040503050406030204" pitchFamily="18" charset="0"/>
+                </a:endParaRPr>
+              </a:p>
+              <a:p>
+                <a:pPr marL="0" indent="0">
+                  <a:buNone/>
+                </a:pPr>
+                <a:r>
+                  <a:rPr lang="en-US" sz="2800" i="1" dirty="0">
+                    <a:latin typeface="Cambria Math" panose="02040503050406030204" pitchFamily="18" charset="0"/>
+                  </a:rPr>
+                  <a:t>	                       </a:t>
+                </a:r>
+                <a14:m>
+                  <m:oMath xmlns:m="http://schemas.openxmlformats.org/officeDocument/2006/math">
+                    <m:r>
+                      <m:rPr>
+                        <m:aln/>
+                      </m:rPr>
+                      <a:rPr lang="en-US" sz="2800" i="1">
+                        <a:latin typeface="Cambria Math"/>
+                      </a:rPr>
+                      <m:t>=</m:t>
+                    </m:r>
+                    <m:r>
+                      <a:rPr lang="en-US" sz="2800" b="0" i="1" smtClean="0">
+                        <a:latin typeface="Cambria Math" panose="02040503050406030204" pitchFamily="18" charset="0"/>
+                      </a:rPr>
+                      <m:t>5.25</m:t>
+                    </m:r>
+                  </m:oMath>
+                </a14:m>
+                <a:endParaRPr lang="en-US" dirty="0"/>
+              </a:p>
+            </p:txBody>
+          </p:sp>
+        </mc:Choice>
+        <mc:Fallback>
+          <p:sp>
+            <p:nvSpPr>
+              <p:cNvPr id="7" name="Content Placeholder 3">
+                <a:extLst>
+                  <a:ext uri="{FF2B5EF4-FFF2-40B4-BE49-F238E27FC236}">
+                    <a16:creationId xmlns:a16="http://schemas.microsoft.com/office/drawing/2014/main" id="{2034EC25-E314-2371-82F2-4FD3DB76022E}"/>
+                  </a:ext>
+                </a:extLst>
+              </p:cNvPr>
+              <p:cNvSpPr>
+                <a:spLocks noGrp="1" noRot="1" noChangeAspect="1" noMove="1" noResize="1" noEditPoints="1" noAdjustHandles="1" noChangeArrowheads="1" noChangeShapeType="1" noTextEdit="1"/>
+              </p:cNvSpPr>
+              <p:nvPr>
+                <p:ph sz="quarter" idx="1"/>
+              </p:nvPr>
+            </p:nvSpPr>
+            <p:spPr>
+              <a:xfrm>
+                <a:off x="609600" y="1219200"/>
+                <a:ext cx="10972800" cy="4937760"/>
+              </a:xfrm>
+              <a:blipFill>
+                <a:blip r:embed="rId2"/>
+                <a:stretch>
+                  <a:fillRect l="-556" t="-1235"/>
+                </a:stretch>
+              </a:blipFill>
+            </p:spPr>
+            <p:txBody>
+              <a:bodyPr/>
+              <a:lstStyle/>
+              <a:p>
+                <a:r>
+                  <a:rPr lang="en-US">
+                    <a:noFill/>
+                  </a:rPr>
+                  <a:t> </a:t>
+                </a:r>
+              </a:p>
+            </p:txBody>
+          </p:sp>
+        </mc:Fallback>
+      </mc:AlternateContent>
+    </p:spTree>
+    <p:extLst>
+      <p:ext uri="{BB962C8B-B14F-4D97-AF65-F5344CB8AC3E}">
+        <p14:creationId xmlns:p14="http://schemas.microsoft.com/office/powerpoint/2010/main" val="2898768650"/>
+      </p:ext>
+    </p:extLst>
+  </p:cSld>
+  <p:clrMapOvr>
+    <a:masterClrMapping/>
+  </p:clrMapOvr>
+</p:sld>
+</file>
+
+<file path=ppt/slides/slide4.xml><?xml version="1.0" encoding="utf-8"?>
+<p:sld xmlns:a="http://schemas.openxmlformats.org/drawingml/2006/main" xmlns:r="http://schemas.openxmlformats.org/officeDocument/2006/relationships" xmlns:p="http://schemas.openxmlformats.org/presentationml/2006/main">
+  <p:cSld>
+    <p:spTree>
+      <p:nvGrpSpPr>
+        <p:cNvPr id="1" name="">
+          <a:extLst>
+            <a:ext uri="{FF2B5EF4-FFF2-40B4-BE49-F238E27FC236}">
+              <a16:creationId xmlns:a16="http://schemas.microsoft.com/office/drawing/2014/main" id="{D01DE315-13A9-17C0-2BCF-2EDA2B04E1DE}"/>
+            </a:ext>
+          </a:extLst>
+        </p:cNvPr>
+        <p:cNvGrpSpPr/>
+        <p:nvPr/>
+      </p:nvGrpSpPr>
+      <p:grpSpPr>
+        <a:xfrm>
+          <a:off x="0" y="0"/>
+          <a:ext cx="0" cy="0"/>
+          <a:chOff x="0" y="0"/>
+          <a:chExt cx="0" cy="0"/>
+        </a:xfrm>
+      </p:grpSpPr>
+      <p:sp>
+        <p:nvSpPr>
+          <p:cNvPr id="2" name="Title 1">
+            <a:extLst>
+              <a:ext uri="{FF2B5EF4-FFF2-40B4-BE49-F238E27FC236}">
+                <a16:creationId xmlns:a16="http://schemas.microsoft.com/office/drawing/2014/main" id="{1F000EC5-11FF-B40D-E96F-A868D391149B}"/>
+              </a:ext>
+            </a:extLst>
+          </p:cNvPr>
+          <p:cNvSpPr>
+            <a:spLocks noGrp="1"/>
+          </p:cNvSpPr>
+          <p:nvPr>
+            <p:ph type="title"/>
+          </p:nvPr>
+        </p:nvSpPr>
+        <p:spPr/>
+        <p:txBody>
+          <a:bodyPr>
+            <a:normAutofit fontScale="90000"/>
+          </a:bodyPr>
+          <a:lstStyle/>
+          <a:p>
+            <a:r>
+              <a:rPr lang="en-US" b="1" dirty="0"/>
+              <a:t>Decoding </a:t>
+            </a:r>
+            <a:r>
+              <a:rPr lang="en-US" sz="3600" b="1" dirty="0">
+                <a:solidFill>
+                  <a:srgbClr val="C00000"/>
+                </a:solidFill>
+                <a:latin typeface="Consolas" panose="020B0609020204030204" pitchFamily="49" charset="0"/>
+                <a:cs typeface="Consolas" panose="020B0609020204030204" pitchFamily="49" charset="0"/>
+              </a:rPr>
+              <a:t>0x42F6E979 </a:t>
+            </a:r>
+            <a:br>
+              <a:rPr lang="en-US" b="1" dirty="0"/>
+            </a:br>
+            <a:r>
+              <a:rPr lang="en-US" b="1" dirty="0"/>
+              <a:t>into a floating-point number</a:t>
+            </a:r>
+            <a:endParaRPr lang="en-US" dirty="0"/>
+          </a:p>
+        </p:txBody>
+      </p:sp>
+      <p:sp>
+        <p:nvSpPr>
+          <p:cNvPr id="3" name="Slide Number Placeholder 2">
+            <a:extLst>
+              <a:ext uri="{FF2B5EF4-FFF2-40B4-BE49-F238E27FC236}">
+                <a16:creationId xmlns:a16="http://schemas.microsoft.com/office/drawing/2014/main" id="{939654E5-F0B9-0DDE-01C7-CF66496BA49C}"/>
+              </a:ext>
+            </a:extLst>
+          </p:cNvPr>
+          <p:cNvSpPr>
+            <a:spLocks noGrp="1"/>
+          </p:cNvSpPr>
+          <p:nvPr>
+            <p:ph type="sldNum" sz="quarter" idx="12"/>
+          </p:nvPr>
+        </p:nvSpPr>
+        <p:spPr/>
+        <p:txBody>
+          <a:bodyPr/>
+          <a:lstStyle/>
+          <a:p>
+            <a:fld id="{EA7C8D44-3667-46F6-9772-CC52308E2A7F}" type="slidenum">
+              <a:rPr kumimoji="0" lang="en-US" smtClean="0"/>
+              <a:pPr/>
+              <a:t>4</a:t>
+            </a:fld>
+            <a:endParaRPr kumimoji="0" lang="en-US" dirty="0"/>
+          </a:p>
+        </p:txBody>
+      </p:sp>
+      <mc:AlternateContent xmlns:mc="http://schemas.openxmlformats.org/markup-compatibility/2006" xmlns:a14="http://schemas.microsoft.com/office/drawing/2010/main">
+        <mc:Choice Requires="a14">
+          <p:sp>
+            <p:nvSpPr>
+              <p:cNvPr id="4" name="Content Placeholder 3">
+                <a:extLst>
+                  <a:ext uri="{FF2B5EF4-FFF2-40B4-BE49-F238E27FC236}">
+                    <a16:creationId xmlns:a16="http://schemas.microsoft.com/office/drawing/2014/main" id="{8EDF4C76-0367-6082-911A-D9E67CF2968B}"/>
+                  </a:ext>
+                </a:extLst>
+              </p:cNvPr>
+              <p:cNvSpPr>
+                <a:spLocks noGrp="1"/>
+              </p:cNvSpPr>
+              <p:nvPr>
+                <p:ph sz="quarter" idx="1"/>
+              </p:nvPr>
+            </p:nvSpPr>
+            <p:spPr/>
+            <p:txBody>
+              <a:bodyPr>
+                <a:normAutofit/>
+              </a:bodyPr>
+              <a:lstStyle/>
+              <a:p>
+                <a:r>
+                  <a:rPr lang="en-US" dirty="0"/>
+                  <a:t>Binary </a:t>
+                </a:r>
+                <a:r>
+                  <a:rPr lang="en-US" dirty="0">
+                    <a:solidFill>
+                      <a:srgbClr val="C00000"/>
+                    </a:solidFill>
+                    <a:latin typeface="Consolas" panose="020B0609020204030204" pitchFamily="49" charset="0"/>
+                    <a:cs typeface="Consolas" panose="020B0609020204030204" pitchFamily="49" charset="0"/>
+                  </a:rPr>
+                  <a:t>0</a:t>
+                </a:r>
+                <a:r>
+                  <a:rPr lang="en-US" dirty="0">
+                    <a:solidFill>
+                      <a:srgbClr val="0000FF"/>
+                    </a:solidFill>
+                    <a:latin typeface="Consolas" panose="020B0609020204030204" pitchFamily="49" charset="0"/>
+                    <a:cs typeface="Consolas" panose="020B0609020204030204" pitchFamily="49" charset="0"/>
+                  </a:rPr>
+                  <a:t>10000101</a:t>
+                </a:r>
+                <a:r>
+                  <a:rPr lang="en-US" dirty="0">
+                    <a:solidFill>
+                      <a:srgbClr val="00B050"/>
+                    </a:solidFill>
+                    <a:latin typeface="Consolas" panose="020B0609020204030204" pitchFamily="49" charset="0"/>
+                    <a:cs typeface="Consolas" panose="020B0609020204030204" pitchFamily="49" charset="0"/>
+                  </a:rPr>
+                  <a:t>11101101110100101111001  </a:t>
+                </a:r>
+              </a:p>
+              <a:p>
+                <a:r>
+                  <a:rPr lang="en-US" sz="2800" dirty="0"/>
+                  <a:t>Sign = </a:t>
+                </a:r>
+                <a:r>
+                  <a:rPr lang="en-US" sz="2800" dirty="0">
+                    <a:latin typeface="Consolas" panose="020B0609020204030204" pitchFamily="49" charset="0"/>
+                    <a:cs typeface="Consolas" panose="020B0609020204030204" pitchFamily="49" charset="0"/>
+                  </a:rPr>
+                  <a:t>0</a:t>
+                </a:r>
+              </a:p>
+              <a:p>
+                <a:r>
+                  <a:rPr lang="en-US" sz="2800" dirty="0"/>
+                  <a:t>Exponent = </a:t>
+                </a:r>
+                <a14:m>
+                  <m:oMath xmlns:m="http://schemas.openxmlformats.org/officeDocument/2006/math">
+                    <m:sSub>
+                      <m:sSubPr>
+                        <m:ctrlPr>
+                          <a:rPr lang="en-US" sz="2800" i="1">
+                            <a:latin typeface="Cambria Math" panose="02040503050406030204" pitchFamily="18" charset="0"/>
+                          </a:rPr>
+                        </m:ctrlPr>
+                      </m:sSubPr>
+                      <m:e>
+                        <m:r>
+                          <a:rPr lang="en-US" sz="2800" i="1">
+                            <a:latin typeface="Cambria Math" panose="02040503050406030204" pitchFamily="18" charset="0"/>
+                          </a:rPr>
+                          <m:t>10000101</m:t>
+                        </m:r>
+                      </m:e>
+                      <m:sub>
+                        <m:r>
+                          <a:rPr lang="en-US" sz="2800" i="1">
+                            <a:latin typeface="Cambria Math"/>
+                          </a:rPr>
+                          <m:t>2</m:t>
+                        </m:r>
+                      </m:sub>
+                    </m:sSub>
+                    <m:r>
+                      <a:rPr lang="en-US" sz="2800" i="1">
+                        <a:latin typeface="Cambria Math"/>
+                      </a:rPr>
+                      <m:t>=133</m:t>
+                    </m:r>
+                  </m:oMath>
+                </a14:m>
+                <a:endParaRPr lang="en-US" sz="2800" dirty="0"/>
+              </a:p>
+              <a:p>
+                <a:r>
+                  <a:rPr lang="en-US" sz="2800" dirty="0"/>
+                  <a:t>Fraction = </a:t>
+                </a:r>
+                <a14:m>
+                  <m:oMath xmlns:m="http://schemas.openxmlformats.org/officeDocument/2006/math">
+                    <m:r>
+                      <a:rPr lang="en-US" sz="2800" i="1" smtClean="0">
+                        <a:latin typeface="Cambria Math" panose="02040503050406030204" pitchFamily="18" charset="0"/>
+                      </a:rPr>
+                      <m:t>0</m:t>
+                    </m:r>
+                    <m:r>
+                      <a:rPr lang="en-US" sz="2800" i="1">
+                        <a:latin typeface="Cambria Math" panose="02040503050406030204" pitchFamily="18" charset="0"/>
+                      </a:rPr>
+                      <m:t>.9271249771118164</m:t>
+                    </m:r>
+                  </m:oMath>
+                </a14:m>
+                <a:endParaRPr lang="en-US" sz="2800" dirty="0"/>
+              </a:p>
+              <a:p>
+                <a14:m>
+                  <m:oMath xmlns:m="http://schemas.openxmlformats.org/officeDocument/2006/math">
+                    <m:r>
+                      <a:rPr lang="en-US" sz="2800" i="1">
+                        <a:latin typeface="Cambria Math"/>
+                      </a:rPr>
+                      <m:t>𝑓</m:t>
+                    </m:r>
+                    <m:r>
+                      <m:rPr>
+                        <m:aln/>
+                      </m:rPr>
+                      <a:rPr lang="en-US" sz="2800" i="1">
+                        <a:latin typeface="Cambria Math"/>
+                      </a:rPr>
+                      <m:t>=</m:t>
+                    </m:r>
+                    <m:sSup>
+                      <m:sSupPr>
+                        <m:ctrlPr>
+                          <a:rPr lang="en-US" sz="2800" i="1">
+                            <a:latin typeface="Cambria Math" panose="02040503050406030204" pitchFamily="18" charset="0"/>
+                          </a:rPr>
+                        </m:ctrlPr>
+                      </m:sSupPr>
+                      <m:e>
+                        <m:d>
+                          <m:dPr>
+                            <m:ctrlPr>
+                              <a:rPr lang="en-US" sz="2800" i="1">
+                                <a:latin typeface="Cambria Math" panose="02040503050406030204" pitchFamily="18" charset="0"/>
+                              </a:rPr>
+                            </m:ctrlPr>
+                          </m:dPr>
+                          <m:e>
+                            <m:r>
+                              <a:rPr lang="en-US" sz="2800" i="1">
+                                <a:latin typeface="Cambria Math"/>
+                              </a:rPr>
+                              <m:t>−1</m:t>
+                            </m:r>
+                          </m:e>
+                        </m:d>
+                      </m:e>
+                      <m:sup>
+                        <m:r>
+                          <a:rPr lang="en-US" sz="2800" i="1">
+                            <a:latin typeface="Cambria Math"/>
+                          </a:rPr>
+                          <m:t>𝑆</m:t>
+                        </m:r>
+                      </m:sup>
+                    </m:sSup>
+                    <m:r>
+                      <a:rPr lang="en-US" sz="2800" i="1">
+                        <a:latin typeface="Cambria Math"/>
+                      </a:rPr>
+                      <m:t>×</m:t>
+                    </m:r>
+                    <m:d>
+                      <m:dPr>
+                        <m:ctrlPr>
+                          <a:rPr lang="en-US" sz="2800" i="1">
+                            <a:latin typeface="Cambria Math" panose="02040503050406030204" pitchFamily="18" charset="0"/>
+                          </a:rPr>
+                        </m:ctrlPr>
+                      </m:dPr>
+                      <m:e>
+                        <m:r>
+                          <a:rPr lang="en-US" sz="2800" i="1">
+                            <a:latin typeface="Cambria Math"/>
+                          </a:rPr>
+                          <m:t>1+</m:t>
+                        </m:r>
+                        <m:r>
+                          <a:rPr lang="en-US" sz="2800" i="1">
+                            <a:latin typeface="Cambria Math"/>
+                          </a:rPr>
+                          <m:t>𝐹𝑟𝑎𝑐𝑡𝑖𝑜𝑛</m:t>
+                        </m:r>
+                      </m:e>
+                    </m:d>
+                    <m:r>
+                      <a:rPr lang="en-US" sz="2800" i="1">
+                        <a:latin typeface="Cambria Math"/>
+                      </a:rPr>
+                      <m:t>×</m:t>
+                    </m:r>
+                    <m:sSup>
+                      <m:sSupPr>
+                        <m:ctrlPr>
+                          <a:rPr lang="en-US" sz="2800" i="1">
+                            <a:latin typeface="Cambria Math" panose="02040503050406030204" pitchFamily="18" charset="0"/>
+                          </a:rPr>
+                        </m:ctrlPr>
+                      </m:sSupPr>
+                      <m:e>
+                        <m:r>
+                          <a:rPr lang="en-US" sz="2800" i="1">
+                            <a:latin typeface="Cambria Math"/>
+                          </a:rPr>
+                          <m:t>2</m:t>
+                        </m:r>
+                      </m:e>
+                      <m:sup>
+                        <m:r>
+                          <a:rPr lang="en-US" sz="2800" i="1">
+                            <a:latin typeface="Cambria Math"/>
+                          </a:rPr>
+                          <m:t>𝐸𝑥𝑝𝑜𝑛𝑒𝑛𝑡</m:t>
+                        </m:r>
+                        <m:r>
+                          <a:rPr lang="en-US" sz="2800" i="1">
+                            <a:latin typeface="Cambria Math"/>
+                          </a:rPr>
+                          <m:t>−127</m:t>
+                        </m:r>
+                      </m:sup>
+                    </m:sSup>
+                  </m:oMath>
+                </a14:m>
+                <a:endParaRPr lang="en-US" sz="2800" i="1" dirty="0">
+                  <a:latin typeface="Cambria Math" panose="02040503050406030204" pitchFamily="18" charset="0"/>
+                </a:endParaRPr>
+              </a:p>
+              <a:p>
+                <a:pPr marL="0" indent="0">
+                  <a:buNone/>
+                </a:pPr>
+                <a14:m>
+                  <m:oMathPara xmlns:m="http://schemas.openxmlformats.org/officeDocument/2006/math">
+                    <m:oMathParaPr>
+                      <m:jc m:val="centerGroup"/>
+                    </m:oMathParaPr>
+                    <m:oMath xmlns:m="http://schemas.openxmlformats.org/officeDocument/2006/math">
+                      <m:r>
+                        <m:rPr>
+                          <m:aln/>
+                        </m:rPr>
+                        <a:rPr lang="en-US" sz="2800" i="1">
+                          <a:latin typeface="Cambria Math"/>
+                        </a:rPr>
+                        <m:t>=</m:t>
+                      </m:r>
+                      <m:sSup>
+                        <m:sSupPr>
+                          <m:ctrlPr>
+                            <a:rPr lang="en-US" sz="2800" i="1">
+                              <a:latin typeface="Cambria Math" panose="02040503050406030204" pitchFamily="18" charset="0"/>
+                            </a:rPr>
+                          </m:ctrlPr>
+                        </m:sSupPr>
+                        <m:e>
+                          <m:d>
+                            <m:dPr>
+                              <m:ctrlPr>
+                                <a:rPr lang="en-US" sz="2800" i="1">
+                                  <a:latin typeface="Cambria Math" panose="02040503050406030204" pitchFamily="18" charset="0"/>
+                                </a:rPr>
+                              </m:ctrlPr>
+                            </m:dPr>
+                            <m:e>
+                              <m:r>
+                                <a:rPr lang="en-US" sz="2800" i="1">
+                                  <a:latin typeface="Cambria Math"/>
+                                </a:rPr>
+                                <m:t>−1</m:t>
+                              </m:r>
+                            </m:e>
+                          </m:d>
+                        </m:e>
+                        <m:sup>
+                          <m:r>
+                            <a:rPr lang="en-US" sz="2800" i="1">
+                              <a:latin typeface="Cambria Math" panose="02040503050406030204" pitchFamily="18" charset="0"/>
+                            </a:rPr>
+                            <m:t>0</m:t>
+                          </m:r>
+                        </m:sup>
+                      </m:sSup>
+                      <m:r>
+                        <a:rPr lang="en-US" sz="2800" i="1">
+                          <a:latin typeface="Cambria Math"/>
+                        </a:rPr>
+                        <m:t>×</m:t>
+                      </m:r>
+                      <m:d>
+                        <m:dPr>
+                          <m:ctrlPr>
+                            <a:rPr lang="en-US" sz="2800" i="1">
+                              <a:latin typeface="Cambria Math" panose="02040503050406030204" pitchFamily="18" charset="0"/>
+                            </a:rPr>
+                          </m:ctrlPr>
+                        </m:dPr>
+                        <m:e>
+                          <m:r>
+                            <a:rPr lang="en-US" sz="2800" i="1">
+                              <a:latin typeface="Cambria Math"/>
+                            </a:rPr>
+                            <m:t>1</m:t>
                           </m:r>
                           <m:r>
                             <a:rPr lang="en-US" sz="2800" i="1">
                               <a:latin typeface="Cambria Math" panose="02040503050406030204" pitchFamily="18" charset="0"/>
                             </a:rPr>
-                            <m:t>0.9271249771118164</m:t>
+                            <m:t>+0.9271249771118164</m:t>
                           </m:r>
                         </m:e>
                       </m:d>
@@ -6124,7 +7643,6 @@
                 </a:r>
               </a:p>
               <a:p>
-                <a:pPr/>
                 <a:r>
                   <a:rPr lang="en-US" dirty="0"/>
                   <a:t>(I will not give overly complete numbers for exams)</a:t>
@@ -6144,7 +7662,7 @@
             </p:txBody>
           </p:sp>
         </mc:Choice>
-        <mc:Fallback>
+        <mc:Fallback xmlns="">
           <p:sp>
             <p:nvSpPr>
               <p:cNvPr id="4" name="Content Placeholder 3">
@@ -6188,6 +7706,854 @@
     <p:extLst>
       <p:ext uri="{BB962C8B-B14F-4D97-AF65-F5344CB8AC3E}">
         <p14:creationId xmlns:p14="http://schemas.microsoft.com/office/powerpoint/2010/main" val="1065607407"/>
+      </p:ext>
+    </p:extLst>
+  </p:cSld>
+  <p:clrMapOvr>
+    <a:masterClrMapping/>
+  </p:clrMapOvr>
+</p:sld>
+</file>
+
+<file path=ppt/slides/slide5.xml><?xml version="1.0" encoding="utf-8"?>
+<p:sld xmlns:a="http://schemas.openxmlformats.org/drawingml/2006/main" xmlns:r="http://schemas.openxmlformats.org/officeDocument/2006/relationships" xmlns:p="http://schemas.openxmlformats.org/presentationml/2006/main">
+  <p:cSld>
+    <p:spTree>
+      <p:nvGrpSpPr>
+        <p:cNvPr id="1" name="">
+          <a:extLst>
+            <a:ext uri="{FF2B5EF4-FFF2-40B4-BE49-F238E27FC236}">
+              <a16:creationId xmlns:a16="http://schemas.microsoft.com/office/drawing/2014/main" id="{54B7839F-6BE1-A1E1-A697-A2628BE5561D}"/>
+            </a:ext>
+          </a:extLst>
+        </p:cNvPr>
+        <p:cNvGrpSpPr/>
+        <p:nvPr/>
+      </p:nvGrpSpPr>
+      <p:grpSpPr>
+        <a:xfrm>
+          <a:off x="0" y="0"/>
+          <a:ext cx="0" cy="0"/>
+          <a:chOff x="0" y="0"/>
+          <a:chExt cx="0" cy="0"/>
+        </a:xfrm>
+      </p:grpSpPr>
+      <p:sp>
+        <p:nvSpPr>
+          <p:cNvPr id="2" name="Title 1">
+            <a:extLst>
+              <a:ext uri="{FF2B5EF4-FFF2-40B4-BE49-F238E27FC236}">
+                <a16:creationId xmlns:a16="http://schemas.microsoft.com/office/drawing/2014/main" id="{B94EA5C0-5C60-1E10-E00C-5623F0B24B3A}"/>
+              </a:ext>
+            </a:extLst>
+          </p:cNvPr>
+          <p:cNvSpPr>
+            <a:spLocks noGrp="1"/>
+          </p:cNvSpPr>
+          <p:nvPr>
+            <p:ph type="title"/>
+          </p:nvPr>
+        </p:nvSpPr>
+        <p:spPr/>
+        <p:txBody>
+          <a:bodyPr>
+            <a:normAutofit fontScale="90000"/>
+          </a:bodyPr>
+          <a:lstStyle/>
+          <a:p>
+            <a:r>
+              <a:rPr lang="en-US" b="1" dirty="0"/>
+              <a:t>Decoding </a:t>
+            </a:r>
+            <a:r>
+              <a:rPr lang="en-US" sz="3600" b="1" dirty="0">
+                <a:solidFill>
+                  <a:srgbClr val="C00000"/>
+                </a:solidFill>
+                <a:latin typeface="Consolas" panose="020B0609020204030204" pitchFamily="49" charset="0"/>
+                <a:cs typeface="Consolas" panose="020B0609020204030204" pitchFamily="49" charset="0"/>
+              </a:rPr>
+              <a:t>0x88888000 </a:t>
+            </a:r>
+            <a:br>
+              <a:rPr lang="en-US" b="1" dirty="0"/>
+            </a:br>
+            <a:r>
+              <a:rPr lang="en-US" b="1" dirty="0"/>
+              <a:t>into a floating-point number</a:t>
+            </a:r>
+            <a:endParaRPr lang="en-US" dirty="0"/>
+          </a:p>
+        </p:txBody>
+      </p:sp>
+      <p:sp>
+        <p:nvSpPr>
+          <p:cNvPr id="3" name="Slide Number Placeholder 2">
+            <a:extLst>
+              <a:ext uri="{FF2B5EF4-FFF2-40B4-BE49-F238E27FC236}">
+                <a16:creationId xmlns:a16="http://schemas.microsoft.com/office/drawing/2014/main" id="{97503BF4-38EF-F913-4D4C-365E8F1C57A5}"/>
+              </a:ext>
+            </a:extLst>
+          </p:cNvPr>
+          <p:cNvSpPr>
+            <a:spLocks noGrp="1"/>
+          </p:cNvSpPr>
+          <p:nvPr>
+            <p:ph type="sldNum" sz="quarter" idx="12"/>
+          </p:nvPr>
+        </p:nvSpPr>
+        <p:spPr/>
+        <p:txBody>
+          <a:bodyPr/>
+          <a:lstStyle/>
+          <a:p>
+            <a:fld id="{EA7C8D44-3667-46F6-9772-CC52308E2A7F}" type="slidenum">
+              <a:rPr kumimoji="0" lang="en-US" smtClean="0"/>
+              <a:pPr/>
+              <a:t>5</a:t>
+            </a:fld>
+            <a:endParaRPr kumimoji="0" lang="en-US" dirty="0"/>
+          </a:p>
+        </p:txBody>
+      </p:sp>
+      <mc:AlternateContent xmlns:mc="http://schemas.openxmlformats.org/markup-compatibility/2006">
+        <mc:Choice xmlns:a14="http://schemas.microsoft.com/office/drawing/2010/main" Requires="a14">
+          <p:sp>
+            <p:nvSpPr>
+              <p:cNvPr id="4" name="Content Placeholder 3">
+                <a:extLst>
+                  <a:ext uri="{FF2B5EF4-FFF2-40B4-BE49-F238E27FC236}">
+                    <a16:creationId xmlns:a16="http://schemas.microsoft.com/office/drawing/2014/main" id="{212C4FEB-6980-3FA2-E64E-87F97E607784}"/>
+                  </a:ext>
+                </a:extLst>
+              </p:cNvPr>
+              <p:cNvSpPr>
+                <a:spLocks noGrp="1"/>
+              </p:cNvSpPr>
+              <p:nvPr>
+                <p:ph sz="quarter" idx="1"/>
+              </p:nvPr>
+            </p:nvSpPr>
+            <p:spPr/>
+            <p:txBody>
+              <a:bodyPr>
+                <a:normAutofit/>
+              </a:bodyPr>
+              <a:lstStyle/>
+              <a:p>
+                <a:r>
+                  <a:rPr lang="en-US" dirty="0"/>
+                  <a:t>Binary </a:t>
+                </a:r>
+                <a:r>
+                  <a:rPr lang="en-US" dirty="0">
+                    <a:solidFill>
+                      <a:srgbClr val="C00000"/>
+                    </a:solidFill>
+                    <a:latin typeface="Consolas" panose="020B0609020204030204" pitchFamily="49" charset="0"/>
+                    <a:cs typeface="Consolas" panose="020B0609020204030204" pitchFamily="49" charset="0"/>
+                  </a:rPr>
+                  <a:t>1</a:t>
+                </a:r>
+                <a:r>
+                  <a:rPr lang="en-US" dirty="0">
+                    <a:solidFill>
+                      <a:srgbClr val="0000FF"/>
+                    </a:solidFill>
+                    <a:latin typeface="Consolas" panose="020B0609020204030204" pitchFamily="49" charset="0"/>
+                    <a:cs typeface="Consolas" panose="020B0609020204030204" pitchFamily="49" charset="0"/>
+                  </a:rPr>
+                  <a:t>00010001</a:t>
+                </a:r>
+                <a:r>
+                  <a:rPr lang="en-US" dirty="0">
+                    <a:solidFill>
+                      <a:srgbClr val="00B050"/>
+                    </a:solidFill>
+                    <a:latin typeface="Consolas" panose="020B0609020204030204" pitchFamily="49" charset="0"/>
+                    <a:cs typeface="Consolas" panose="020B0609020204030204" pitchFamily="49" charset="0"/>
+                  </a:rPr>
+                  <a:t>00010001000000000000000</a:t>
+                </a:r>
+              </a:p>
+              <a:p>
+                <a:r>
+                  <a:rPr lang="en-US" sz="2800" dirty="0"/>
+                  <a:t>Sign = </a:t>
+                </a:r>
+                <a:r>
+                  <a:rPr lang="en-US" sz="2800" dirty="0">
+                    <a:latin typeface="Consolas" panose="020B0609020204030204" pitchFamily="49" charset="0"/>
+                    <a:cs typeface="Consolas" panose="020B0609020204030204" pitchFamily="49" charset="0"/>
+                  </a:rPr>
+                  <a:t>1</a:t>
+                </a:r>
+              </a:p>
+              <a:p>
+                <a:r>
+                  <a:rPr lang="en-US" sz="2800" dirty="0"/>
+                  <a:t>Exponent = </a:t>
+                </a:r>
+                <a14:m>
+                  <m:oMath xmlns:m="http://schemas.openxmlformats.org/officeDocument/2006/math">
+                    <m:sSub>
+                      <m:sSubPr>
+                        <m:ctrlPr>
+                          <a:rPr lang="en-US" sz="2800" i="1">
+                            <a:latin typeface="Cambria Math" panose="02040503050406030204" pitchFamily="18" charset="0"/>
+                          </a:rPr>
+                        </m:ctrlPr>
+                      </m:sSubPr>
+                      <m:e>
+                        <m:r>
+                          <a:rPr lang="en-US" sz="2800" i="1">
+                            <a:latin typeface="Cambria Math" panose="02040503050406030204" pitchFamily="18" charset="0"/>
+                          </a:rPr>
+                          <m:t>00010001</m:t>
+                        </m:r>
+                      </m:e>
+                      <m:sub>
+                        <m:r>
+                          <a:rPr lang="en-US" sz="2800" i="1">
+                            <a:latin typeface="Cambria Math"/>
+                          </a:rPr>
+                          <m:t>2</m:t>
+                        </m:r>
+                      </m:sub>
+                    </m:sSub>
+                    <m:r>
+                      <a:rPr lang="en-US" sz="2800" i="1">
+                        <a:latin typeface="Cambria Math"/>
+                      </a:rPr>
+                      <m:t>=</m:t>
+                    </m:r>
+                    <m:r>
+                      <a:rPr lang="en-US" sz="2800" i="1">
+                        <a:latin typeface="Cambria Math"/>
+                      </a:rPr>
+                      <m:t>17</m:t>
+                    </m:r>
+                  </m:oMath>
+                </a14:m>
+                <a:endParaRPr lang="en-US" sz="2800" dirty="0"/>
+              </a:p>
+              <a:p>
+                <a:r>
+                  <a:rPr lang="en-US" sz="2800" dirty="0"/>
+                  <a:t>Fraction = 2^-3 + 2^-7 </a:t>
+                </a:r>
+                <a14:m>
+                  <m:oMath xmlns:m="http://schemas.openxmlformats.org/officeDocument/2006/math">
+                    <m:r>
+                      <a:rPr lang="en-US" sz="2800" i="1">
+                        <a:latin typeface="Cambria Math" panose="02040503050406030204" pitchFamily="18" charset="0"/>
+                      </a:rPr>
+                      <m:t>=</m:t>
+                    </m:r>
+                    <m:r>
+                      <a:rPr lang="en-US" sz="2800" i="1">
+                        <a:latin typeface="Cambria Math" panose="02040503050406030204" pitchFamily="18" charset="0"/>
+                      </a:rPr>
+                      <m:t>0</m:t>
+                    </m:r>
+                    <m:r>
+                      <a:rPr lang="en-US" sz="2800" i="1">
+                        <a:latin typeface="Cambria Math" panose="02040503050406030204" pitchFamily="18" charset="0"/>
+                      </a:rPr>
+                      <m:t>.</m:t>
+                    </m:r>
+                    <m:r>
+                      <a:rPr lang="en-US" sz="2800" i="1">
+                        <a:latin typeface="Cambria Math" panose="02040503050406030204" pitchFamily="18" charset="0"/>
+                      </a:rPr>
+                      <m:t>1328125</m:t>
+                    </m:r>
+                  </m:oMath>
+                </a14:m>
+                <a:endParaRPr lang="en-US" sz="2800" dirty="0"/>
+              </a:p>
+              <a:p>
+                <a14:m>
+                  <m:oMath xmlns:m="http://schemas.openxmlformats.org/officeDocument/2006/math">
+                    <m:r>
+                      <a:rPr lang="en-US" sz="2800" i="1">
+                        <a:latin typeface="Cambria Math"/>
+                      </a:rPr>
+                      <m:t>𝑓</m:t>
+                    </m:r>
+                    <m:r>
+                      <m:rPr>
+                        <m:aln/>
+                      </m:rPr>
+                      <a:rPr lang="en-US" sz="2800" i="1">
+                        <a:latin typeface="Cambria Math"/>
+                      </a:rPr>
+                      <m:t>=</m:t>
+                    </m:r>
+                    <m:sSup>
+                      <m:sSupPr>
+                        <m:ctrlPr>
+                          <a:rPr lang="en-US" sz="2800" i="1">
+                            <a:latin typeface="Cambria Math" panose="02040503050406030204" pitchFamily="18" charset="0"/>
+                          </a:rPr>
+                        </m:ctrlPr>
+                      </m:sSupPr>
+                      <m:e>
+                        <m:d>
+                          <m:dPr>
+                            <m:ctrlPr>
+                              <a:rPr lang="en-US" sz="2800" i="1">
+                                <a:latin typeface="Cambria Math" panose="02040503050406030204" pitchFamily="18" charset="0"/>
+                              </a:rPr>
+                            </m:ctrlPr>
+                          </m:dPr>
+                          <m:e>
+                            <m:r>
+                              <a:rPr lang="en-US" sz="2800" i="1">
+                                <a:latin typeface="Cambria Math"/>
+                              </a:rPr>
+                              <m:t>−</m:t>
+                            </m:r>
+                            <m:r>
+                              <a:rPr lang="en-US" sz="2800" i="1">
+                                <a:latin typeface="Cambria Math"/>
+                              </a:rPr>
+                              <m:t>1</m:t>
+                            </m:r>
+                          </m:e>
+                        </m:d>
+                      </m:e>
+                      <m:sup>
+                        <m:r>
+                          <a:rPr lang="en-US" sz="2800" i="1">
+                            <a:latin typeface="Cambria Math"/>
+                          </a:rPr>
+                          <m:t>𝑆</m:t>
+                        </m:r>
+                      </m:sup>
+                    </m:sSup>
+                    <m:r>
+                      <a:rPr lang="en-US" sz="2800" i="1">
+                        <a:latin typeface="Cambria Math"/>
+                      </a:rPr>
+                      <m:t>×</m:t>
+                    </m:r>
+                    <m:d>
+                      <m:dPr>
+                        <m:ctrlPr>
+                          <a:rPr lang="en-US" sz="2800" i="1">
+                            <a:latin typeface="Cambria Math" panose="02040503050406030204" pitchFamily="18" charset="0"/>
+                          </a:rPr>
+                        </m:ctrlPr>
+                      </m:dPr>
+                      <m:e>
+                        <m:r>
+                          <a:rPr lang="en-US" sz="2800" i="1">
+                            <a:latin typeface="Cambria Math"/>
+                          </a:rPr>
+                          <m:t>1</m:t>
+                        </m:r>
+                        <m:r>
+                          <a:rPr lang="en-US" sz="2800" i="1">
+                            <a:latin typeface="Cambria Math"/>
+                          </a:rPr>
+                          <m:t>+</m:t>
+                        </m:r>
+                        <m:r>
+                          <a:rPr lang="en-US" sz="2800" i="1">
+                            <a:latin typeface="Cambria Math"/>
+                          </a:rPr>
+                          <m:t>𝐹𝑟𝑎𝑐𝑡𝑖𝑜𝑛</m:t>
+                        </m:r>
+                      </m:e>
+                    </m:d>
+                    <m:r>
+                      <a:rPr lang="en-US" sz="2800" i="1">
+                        <a:latin typeface="Cambria Math"/>
+                      </a:rPr>
+                      <m:t>×</m:t>
+                    </m:r>
+                    <m:sSup>
+                      <m:sSupPr>
+                        <m:ctrlPr>
+                          <a:rPr lang="en-US" sz="2800" i="1">
+                            <a:latin typeface="Cambria Math" panose="02040503050406030204" pitchFamily="18" charset="0"/>
+                          </a:rPr>
+                        </m:ctrlPr>
+                      </m:sSupPr>
+                      <m:e>
+                        <m:r>
+                          <a:rPr lang="en-US" sz="2800" i="1">
+                            <a:latin typeface="Cambria Math"/>
+                          </a:rPr>
+                          <m:t>2</m:t>
+                        </m:r>
+                      </m:e>
+                      <m:sup>
+                        <m:r>
+                          <a:rPr lang="en-US" sz="2800" i="1">
+                            <a:latin typeface="Cambria Math"/>
+                          </a:rPr>
+                          <m:t>𝐸𝑥𝑝𝑜𝑛𝑒𝑛𝑡</m:t>
+                        </m:r>
+                        <m:r>
+                          <a:rPr lang="en-US" sz="2800" i="1">
+                            <a:latin typeface="Cambria Math"/>
+                          </a:rPr>
+                          <m:t>−</m:t>
+                        </m:r>
+                        <m:r>
+                          <a:rPr lang="en-US" sz="2800" i="1">
+                            <a:latin typeface="Cambria Math"/>
+                          </a:rPr>
+                          <m:t>127</m:t>
+                        </m:r>
+                      </m:sup>
+                    </m:sSup>
+                  </m:oMath>
+                </a14:m>
+                <a:endParaRPr lang="en-US" sz="2800" i="1" dirty="0">
+                  <a:latin typeface="Cambria Math" panose="02040503050406030204" pitchFamily="18" charset="0"/>
+                </a:endParaRPr>
+              </a:p>
+              <a:p>
+                <a:pPr marL="0" indent="0">
+                  <a:buNone/>
+                </a:pPr>
+                <a14:m>
+                  <m:oMathPara xmlns:m="http://schemas.openxmlformats.org/officeDocument/2006/math">
+                    <m:oMathParaPr>
+                      <m:jc m:val="centerGroup"/>
+                    </m:oMathParaPr>
+                    <m:oMath xmlns:m="http://schemas.openxmlformats.org/officeDocument/2006/math">
+                      <m:r>
+                        <m:rPr>
+                          <m:aln/>
+                        </m:rPr>
+                        <a:rPr lang="en-US" sz="2800" i="1">
+                          <a:latin typeface="Cambria Math"/>
+                        </a:rPr>
+                        <m:t>=</m:t>
+                      </m:r>
+                      <m:r>
+                        <a:rPr lang="en-US" sz="2800" i="1">
+                          <a:latin typeface="Cambria Math" panose="02040503050406030204" pitchFamily="18" charset="0"/>
+                        </a:rPr>
+                        <m:t>−</m:t>
+                      </m:r>
+                      <m:r>
+                        <a:rPr lang="en-US" sz="2800" i="1">
+                          <a:latin typeface="Cambria Math" panose="02040503050406030204" pitchFamily="18" charset="0"/>
+                        </a:rPr>
+                        <m:t>1</m:t>
+                      </m:r>
+                      <m:r>
+                        <a:rPr lang="en-US" sz="2800" i="1">
+                          <a:latin typeface="Cambria Math"/>
+                        </a:rPr>
+                        <m:t>×</m:t>
+                      </m:r>
+                      <m:d>
+                        <m:dPr>
+                          <m:ctrlPr>
+                            <a:rPr lang="en-US" sz="2800" i="1">
+                              <a:latin typeface="Cambria Math" panose="02040503050406030204" pitchFamily="18" charset="0"/>
+                            </a:rPr>
+                          </m:ctrlPr>
+                        </m:dPr>
+                        <m:e>
+                          <m:r>
+                            <a:rPr lang="en-US" sz="2800" i="1">
+                              <a:latin typeface="Cambria Math"/>
+                            </a:rPr>
+                            <m:t>1</m:t>
+                          </m:r>
+                          <m:r>
+                            <a:rPr lang="en-US" sz="2800" i="1">
+                              <a:latin typeface="Cambria Math" panose="02040503050406030204" pitchFamily="18" charset="0"/>
+                            </a:rPr>
+                            <m:t>+</m:t>
+                          </m:r>
+                          <m:r>
+                            <a:rPr lang="en-US" sz="2800" i="1">
+                              <a:latin typeface="Cambria Math" panose="02040503050406030204" pitchFamily="18" charset="0"/>
+                            </a:rPr>
+                            <m:t>0</m:t>
+                          </m:r>
+                          <m:r>
+                            <a:rPr lang="en-US" sz="2800" i="1">
+                              <a:latin typeface="Cambria Math" panose="02040503050406030204" pitchFamily="18" charset="0"/>
+                            </a:rPr>
+                            <m:t>.</m:t>
+                          </m:r>
+                          <m:r>
+                            <a:rPr lang="en-US" sz="2800" i="1">
+                              <a:latin typeface="Cambria Math" panose="02040503050406030204" pitchFamily="18" charset="0"/>
+                            </a:rPr>
+                            <m:t>06640625</m:t>
+                          </m:r>
+                        </m:e>
+                      </m:d>
+                      <m:r>
+                        <a:rPr lang="en-US" sz="2800" i="1">
+                          <a:latin typeface="Cambria Math"/>
+                        </a:rPr>
+                        <m:t>×</m:t>
+                      </m:r>
+                      <m:sSup>
+                        <m:sSupPr>
+                          <m:ctrlPr>
+                            <a:rPr lang="en-US" sz="2800" i="1">
+                              <a:latin typeface="Cambria Math" panose="02040503050406030204" pitchFamily="18" charset="0"/>
+                            </a:rPr>
+                          </m:ctrlPr>
+                        </m:sSupPr>
+                        <m:e>
+                          <m:r>
+                            <a:rPr lang="en-US" sz="2800" i="1">
+                              <a:latin typeface="Cambria Math"/>
+                            </a:rPr>
+                            <m:t>2</m:t>
+                          </m:r>
+                        </m:e>
+                        <m:sup>
+                          <m:r>
+                            <a:rPr lang="en-US" sz="2800" i="1">
+                              <a:latin typeface="Cambria Math"/>
+                            </a:rPr>
+                            <m:t>1</m:t>
+                          </m:r>
+                          <m:r>
+                            <a:rPr lang="en-US" sz="2800" i="1">
+                              <a:latin typeface="Cambria Math" panose="02040503050406030204" pitchFamily="18" charset="0"/>
+                            </a:rPr>
+                            <m:t>7</m:t>
+                          </m:r>
+                          <m:r>
+                            <a:rPr lang="en-US" sz="2800" i="1">
+                              <a:latin typeface="Cambria Math"/>
+                            </a:rPr>
+                            <m:t>−</m:t>
+                          </m:r>
+                          <m:r>
+                            <a:rPr lang="en-US" sz="2800" i="1">
+                              <a:latin typeface="Cambria Math"/>
+                            </a:rPr>
+                            <m:t>127</m:t>
+                          </m:r>
+                        </m:sup>
+                      </m:sSup>
+                    </m:oMath>
+                    <m:oMath xmlns:m="http://schemas.openxmlformats.org/officeDocument/2006/math">
+                      <m:r>
+                        <m:rPr>
+                          <m:aln/>
+                        </m:rPr>
+                        <a:rPr lang="en-US" sz="2800" i="1">
+                          <a:latin typeface="Cambria Math"/>
+                        </a:rPr>
+                        <m:t>=</m:t>
+                      </m:r>
+                      <m:r>
+                        <a:rPr lang="en-US" sz="2800" i="1">
+                          <a:latin typeface="Cambria Math"/>
+                        </a:rPr>
+                        <m:t>−</m:t>
+                      </m:r>
+                      <m:r>
+                        <a:rPr lang="en-US" sz="2800" i="1">
+                          <a:latin typeface="Cambria Math" panose="02040503050406030204" pitchFamily="18" charset="0"/>
+                        </a:rPr>
+                        <m:t>1</m:t>
+                      </m:r>
+                      <m:r>
+                        <a:rPr lang="en-US" sz="2800" i="1">
+                          <a:latin typeface="Cambria Math" panose="02040503050406030204" pitchFamily="18" charset="0"/>
+                        </a:rPr>
+                        <m:t>.</m:t>
+                      </m:r>
+                      <m:r>
+                        <a:rPr lang="en-US" sz="2800" i="1">
+                          <a:latin typeface="Cambria Math" panose="02040503050406030204" pitchFamily="18" charset="0"/>
+                        </a:rPr>
+                        <m:t>06640625</m:t>
+                      </m:r>
+                      <m:r>
+                        <a:rPr lang="en-US" sz="2800" i="1">
+                          <a:latin typeface="Cambria Math"/>
+                        </a:rPr>
+                        <m:t>×</m:t>
+                      </m:r>
+                      <m:sSup>
+                        <m:sSupPr>
+                          <m:ctrlPr>
+                            <a:rPr lang="en-US" sz="2800" i="1">
+                              <a:latin typeface="Cambria Math" panose="02040503050406030204" pitchFamily="18" charset="0"/>
+                            </a:rPr>
+                          </m:ctrlPr>
+                        </m:sSupPr>
+                        <m:e>
+                          <m:r>
+                            <a:rPr lang="en-US" sz="2800" i="1">
+                              <a:latin typeface="Cambria Math"/>
+                            </a:rPr>
+                            <m:t>2</m:t>
+                          </m:r>
+                        </m:e>
+                        <m:sup>
+                          <m:r>
+                            <a:rPr lang="en-US" sz="2800" i="1">
+                              <a:latin typeface="Cambria Math" panose="02040503050406030204" pitchFamily="18" charset="0"/>
+                            </a:rPr>
+                            <m:t>−</m:t>
+                          </m:r>
+                          <m:r>
+                            <a:rPr lang="en-US" sz="2800" i="1">
+                              <a:latin typeface="Cambria Math" panose="02040503050406030204" pitchFamily="18" charset="0"/>
+                            </a:rPr>
+                            <m:t>110</m:t>
+                          </m:r>
+                        </m:sup>
+                      </m:sSup>
+                    </m:oMath>
+                  </m:oMathPara>
+                </a14:m>
+                <a:br>
+                  <a:rPr lang="en-US" sz="2800" i="1" dirty="0">
+                    <a:latin typeface="Cambria Math"/>
+                  </a:rPr>
+                </a:br>
+                <a:endParaRPr lang="en-US" sz="2800" dirty="0"/>
+              </a:p>
+              <a:p>
+                <a:pPr marL="0" indent="0">
+                  <a:buNone/>
+                </a:pPr>
+                <a:endParaRPr lang="en-US" sz="2800" i="1" dirty="0">
+                  <a:latin typeface="Cambria Math" panose="02040503050406030204" pitchFamily="18" charset="0"/>
+                </a:endParaRPr>
+              </a:p>
+              <a:p>
+                <a:pPr marL="0" indent="0">
+                  <a:buNone/>
+                </a:pPr>
+                <a:endParaRPr lang="en-US" dirty="0">
+                  <a:solidFill>
+                    <a:srgbClr val="00B050"/>
+                  </a:solidFill>
+                  <a:latin typeface="Consolas" panose="020B0609020204030204" pitchFamily="49" charset="0"/>
+                </a:endParaRPr>
+              </a:p>
+              <a:p>
+                <a:pPr marL="0" indent="0">
+                  <a:buNone/>
+                </a:pPr>
+                <a:endParaRPr lang="en-US" dirty="0">
+                  <a:solidFill>
+                    <a:srgbClr val="00B050"/>
+                  </a:solidFill>
+                  <a:latin typeface="Consolas" panose="020B0609020204030204" pitchFamily="49" charset="0"/>
+                </a:endParaRPr>
+              </a:p>
+            </p:txBody>
+          </p:sp>
+        </mc:Choice>
+        <mc:Fallback>
+          <p:sp>
+            <p:nvSpPr>
+              <p:cNvPr id="4" name="Content Placeholder 3">
+                <a:extLst>
+                  <a:ext uri="{FF2B5EF4-FFF2-40B4-BE49-F238E27FC236}">
+                    <a16:creationId xmlns:a16="http://schemas.microsoft.com/office/drawing/2014/main" id="{212C4FEB-6980-3FA2-E64E-87F97E607784}"/>
+                  </a:ext>
+                </a:extLst>
+              </p:cNvPr>
+              <p:cNvSpPr>
+                <a:spLocks noGrp="1" noRot="1" noChangeAspect="1" noMove="1" noResize="1" noEditPoints="1" noAdjustHandles="1" noChangeArrowheads="1" noChangeShapeType="1" noTextEdit="1"/>
+              </p:cNvSpPr>
+              <p:nvPr>
+                <p:ph sz="quarter" idx="1"/>
+              </p:nvPr>
+            </p:nvSpPr>
+            <p:spPr>
+              <a:blipFill>
+                <a:blip r:embed="rId3"/>
+                <a:stretch>
+                  <a:fillRect l="-556" t="-1235"/>
+                </a:stretch>
+              </a:blipFill>
+            </p:spPr>
+            <p:txBody>
+              <a:bodyPr/>
+              <a:lstStyle/>
+              <a:p>
+                <a:r>
+                  <a:rPr lang="en-US">
+                    <a:noFill/>
+                  </a:rPr>
+                  <a:t> </a:t>
+                </a:r>
+              </a:p>
+            </p:txBody>
+          </p:sp>
+        </mc:Fallback>
+      </mc:AlternateContent>
+    </p:spTree>
+    <p:extLst>
+      <p:ext uri="{BB962C8B-B14F-4D97-AF65-F5344CB8AC3E}">
+        <p14:creationId xmlns:p14="http://schemas.microsoft.com/office/powerpoint/2010/main" val="2456191673"/>
+      </p:ext>
+    </p:extLst>
+  </p:cSld>
+  <p:clrMapOvr>
+    <a:masterClrMapping/>
+  </p:clrMapOvr>
+</p:sld>
+</file>
+
+<file path=ppt/slides/slide6.xml><?xml version="1.0" encoding="utf-8"?>
+<p:sld xmlns:a="http://schemas.openxmlformats.org/drawingml/2006/main" xmlns:r="http://schemas.openxmlformats.org/officeDocument/2006/relationships" xmlns:p="http://schemas.openxmlformats.org/presentationml/2006/main">
+  <p:cSld>
+    <p:spTree>
+      <p:nvGrpSpPr>
+        <p:cNvPr id="1" name=""/>
+        <p:cNvGrpSpPr/>
+        <p:nvPr/>
+      </p:nvGrpSpPr>
+      <p:grpSpPr>
+        <a:xfrm>
+          <a:off x="0" y="0"/>
+          <a:ext cx="0" cy="0"/>
+          <a:chOff x="0" y="0"/>
+          <a:chExt cx="0" cy="0"/>
+        </a:xfrm>
+      </p:grpSpPr>
+      <p:sp>
+        <p:nvSpPr>
+          <p:cNvPr id="2" name="Title 1">
+            <a:extLst>
+              <a:ext uri="{FF2B5EF4-FFF2-40B4-BE49-F238E27FC236}">
+                <a16:creationId xmlns:a16="http://schemas.microsoft.com/office/drawing/2014/main" id="{323F312F-1437-6DE5-0479-5FF9241233B3}"/>
+              </a:ext>
+            </a:extLst>
+          </p:cNvPr>
+          <p:cNvSpPr>
+            <a:spLocks noGrp="1"/>
+          </p:cNvSpPr>
+          <p:nvPr>
+            <p:ph type="title"/>
+          </p:nvPr>
+        </p:nvSpPr>
+        <p:spPr/>
+        <p:txBody>
+          <a:bodyPr/>
+          <a:lstStyle/>
+          <a:p>
+            <a:r>
+              <a:rPr lang="en-US"/>
+              <a:t>References</a:t>
+            </a:r>
+            <a:endParaRPr lang="en-US" dirty="0"/>
+          </a:p>
+        </p:txBody>
+      </p:sp>
+      <p:sp>
+        <p:nvSpPr>
+          <p:cNvPr id="3" name="Slide Number Placeholder 2">
+            <a:extLst>
+              <a:ext uri="{FF2B5EF4-FFF2-40B4-BE49-F238E27FC236}">
+                <a16:creationId xmlns:a16="http://schemas.microsoft.com/office/drawing/2014/main" id="{637E1A3E-3104-AB42-2D73-27A9623868DA}"/>
+              </a:ext>
+            </a:extLst>
+          </p:cNvPr>
+          <p:cNvSpPr>
+            <a:spLocks noGrp="1"/>
+          </p:cNvSpPr>
+          <p:nvPr>
+            <p:ph type="sldNum" sz="quarter" idx="12"/>
+          </p:nvPr>
+        </p:nvSpPr>
+        <p:spPr/>
+        <p:txBody>
+          <a:bodyPr/>
+          <a:lstStyle/>
+          <a:p>
+            <a:fld id="{EA7C8D44-3667-46F6-9772-CC52308E2A7F}" type="slidenum">
+              <a:rPr kumimoji="0" lang="en-US" smtClean="0"/>
+              <a:pPr/>
+              <a:t>6</a:t>
+            </a:fld>
+            <a:endParaRPr kumimoji="0" lang="en-US" dirty="0"/>
+          </a:p>
+        </p:txBody>
+      </p:sp>
+      <p:sp>
+        <p:nvSpPr>
+          <p:cNvPr id="4" name="Content Placeholder 3">
+            <a:extLst>
+              <a:ext uri="{FF2B5EF4-FFF2-40B4-BE49-F238E27FC236}">
+                <a16:creationId xmlns:a16="http://schemas.microsoft.com/office/drawing/2014/main" id="{8E7AD109-943E-C2C4-7A01-0E7FF39C01C4}"/>
+              </a:ext>
+            </a:extLst>
+          </p:cNvPr>
+          <p:cNvSpPr>
+            <a:spLocks noGrp="1"/>
+          </p:cNvSpPr>
+          <p:nvPr>
+            <p:ph sz="quarter" idx="1"/>
+          </p:nvPr>
+        </p:nvSpPr>
+        <p:spPr/>
+        <p:txBody>
+          <a:bodyPr/>
+          <a:lstStyle/>
+          <a:p>
+            <a:r>
+              <a:rPr lang="en-US" dirty="0"/>
+              <a:t>IEEE 754 Binary to Float Conversion</a:t>
+            </a:r>
+          </a:p>
+          <a:p>
+            <a:pPr lvl="1"/>
+            <a:r>
+              <a:rPr lang="en-US" dirty="0">
+                <a:hlinkClick r:id="rId2"/>
+              </a:rPr>
+              <a:t>https://www.youtube.com/watch?v=9k5rdPUzij8&amp;list=PL-ftFcielQtGxBUfzkbz9tWlRZb-rlJ2p&amp;index=2</a:t>
+            </a:r>
+            <a:r>
+              <a:rPr lang="en-US" dirty="0"/>
+              <a:t> </a:t>
+            </a:r>
+          </a:p>
+          <a:p>
+            <a:r>
+              <a:rPr lang="en-US" dirty="0"/>
+              <a:t>IEEE 754 Float to Binary Conversion</a:t>
+            </a:r>
+          </a:p>
+          <a:p>
+            <a:pPr lvl="1"/>
+            <a:r>
+              <a:rPr lang="en-US" dirty="0">
+                <a:hlinkClick r:id="rId2"/>
+              </a:rPr>
+              <a:t>https://www.youtube.com/watch?v=9k5rdPUzij8&amp;list=PL-ftFcielQtGxBUfzkbz9tWlRZb-rlJ2p&amp;index=2</a:t>
+            </a:r>
+            <a:r>
+              <a:rPr lang="en-US" dirty="0"/>
+              <a:t> </a:t>
+            </a:r>
+          </a:p>
+          <a:p>
+            <a:endParaRPr lang="en-US" dirty="0"/>
+          </a:p>
+        </p:txBody>
+      </p:sp>
+    </p:spTree>
+    <p:extLst>
+      <p:ext uri="{BB962C8B-B14F-4D97-AF65-F5344CB8AC3E}">
+        <p14:creationId xmlns:p14="http://schemas.microsoft.com/office/powerpoint/2010/main" val="778539605"/>
       </p:ext>
     </p:extLst>
   </p:cSld>
